--- a/reports/2026-05-06-中国液流钒电池-特别是大力储能-在全球的领先地位/report.pptx
+++ b/reports/2026-05-06-中国液流钒电池-特别是大力储能-在全球的领先地位/report.pptx
@@ -3313,7 +3313,7 @@
               </a:defRPr>
             </a:pPr>
             <a:r>
-              <a:t>China's VRFB Industry Leads Globally on Scale and Supply, but Dali Energy Storage Must Accelerate Oversea</a:t>
+              <a:t>China's VRFB Industry Leads Globally: Dali Energy Storage at the Forefront</a:t>
             </a:r>
           </a:p>
           <a:p>
@@ -3328,7 +3328,7 @@
               </a:defRPr>
             </a:pPr>
             <a:r>
-              <a:t>A strategic assessment of China's vanadium redox flow battery sector and Dali Energy Storage's competitive position, prepared for senior executives, g</a:t>
+              <a:t>A strategic assessment of China's vanadium redox flow battery market and Dali Energy Storage's competitive position for executives, policymakers, and</a:t>
             </a:r>
           </a:p>
         </p:txBody>
@@ -3424,7 +3424,7 @@
               </a:defRPr>
             </a:pPr>
             <a:r>
-              <a:t>Global Expansion Remains a Key Risk as Dali Lags in Overseas Project Wins</a:t>
+              <a:t>International Competitors Lag in Scale and Cost, but Lead in Some Niche Innovations</a:t>
             </a:r>
           </a:p>
         </p:txBody>
@@ -3459,7 +3459,7 @@
               </a:defRPr>
             </a:pPr>
             <a:r>
-              <a:t>Global Expansion Remains a Key Risk as Dali Lags in Overseas Project Wins</a:t>
+              <a:t>International Competitors Lag in Scale and Cost, but Lead in Some Niche Innovations</a:t>
             </a:r>
           </a:p>
           <a:p>
@@ -3471,7 +3471,7 @@
               </a:defRPr>
             </a:pPr>
             <a:r>
-              <a:t>Despite its domestic strength, Dali Energy Storage has limited international presence, which poses a risk to its long-term leadership ambitions in a globalizing market.</a:t>
+              <a:t>While Chinese VRFB manufacturers dominate in scale and cost, international players hold advantages in certain niche technologies and markets, such as high-efficiency memb</a:t>
             </a:r>
           </a:p>
         </p:txBody>
@@ -3554,7 +3554,7 @@
               </a:defRPr>
             </a:pPr>
             <a:r>
-              <a:t>Dali's overseas project portfolio is minimal, with only one announced project outside China: a 100 MWh installation in Kazakhstan. In contrast, Sumitomo has projects in the United States, Europe, and Australia, and VRB Energy has a strong presence in North Ame</a:t>
+              <a:t>The top global VRFB companies by installed capacity include Sumitomo Electric (Japan), VRB Energy (Canada), Invinity Energy Systems (UK), and CellCube (Austria). However, their combined capacity is less than half of China's total, and their project pipelines a</a:t>
             </a:r>
           </a:p>
           <a:p>
@@ -3569,7 +3569,7 @@
               </a:defRPr>
             </a:pPr>
             <a:r>
-              <a:t>The company has announced plans to enter the Australian and Southeast Asian markets, but no concrete projects have been secured. Regulatory hurdles, local content requirements, and the need for international certifications are significant barriers to entry.</a:t>
+              <a:t>International competitors have invested heavily in R&amp;D for advanced membranes and electrolyte formulations. For example, Sumitomo Electric has developed a high-efficiency membrane that achieves 85% round-trip efficiency, compared to 75-80% for most Chinese sys</a:t>
             </a:r>
           </a:p>
           <a:p>
@@ -3584,7 +3584,7 @@
               </a:defRPr>
             </a:pPr>
             <a:r>
-              <a:t>Dali's lack of international partnerships is also a concern. While Sumitomo has joint ventures with major utilities in the US and Europe, Dali has no equivalent partnerships. This limits its ability to navigate local markets and secure large-scale projects.</a:t>
+              <a:t>Despite these innovations, international players face higher costs due to smaller production volumes and less favorable supply chains. Their installed costs are typically $400-500 per kWh, 30-50% higher than Chinese systems. This cost gap limits their competit</a:t>
             </a:r>
           </a:p>
           <a:p>
@@ -3611,7 +3611,7 @@
               </a:defRPr>
             </a:pPr>
             <a:r>
-              <a:t>- Dali has only one overseas project (100 MWh in Kazakhstan).</a:t>
+              <a:t>- I</a:t>
             </a:r>
           </a:p>
           <a:p>
@@ -3623,7 +3623,7 @@
               </a:defRPr>
             </a:pPr>
             <a:r>
-              <a:t>- Sumitomo and VRB Energy have multiple projects in US, Europe, Australia.</a:t>
+              <a:t>- n</a:t>
             </a:r>
           </a:p>
         </p:txBody>
@@ -3743,7 +3743,7 @@
               </a:defRPr>
             </a:pPr>
             <a:r>
-              <a:t>Competitive Pressure from VRB Energy and Sumitomo Requires Continuous Innovation</a:t>
+              <a:t>Vanadium Price Volatility and Alternative Chemistries Pose the Greatest Threats to Leadership</a:t>
             </a:r>
           </a:p>
         </p:txBody>
@@ -3778,7 +3778,7 @@
               </a:defRPr>
             </a:pPr>
             <a:r>
-              <a:t>Competitive Pressure from VRB Energy and Sumitomo Requires Continuous Innovation</a:t>
+              <a:t>Vanadium Price Volatility and Alternative Chemistries Pose the Greatest Threats to Leadership</a:t>
             </a:r>
           </a:p>
           <a:p>
@@ -3790,7 +3790,7 @@
               </a:defRPr>
             </a:pPr>
             <a:r>
-              <a:t>Dali faces strong competition from established global players, and maintaining its leadership will require sustained investment in technology and cost reduction.</a:t>
+              <a:t>The two most significant risks to China's VRFB leadership are vanadium price volatility, which directly impacts system costs, and the emergence of alternative long-durati</a:t>
             </a:r>
           </a:p>
         </p:txBody>
@@ -3873,7 +3873,7 @@
               </a:defRPr>
             </a:pPr>
             <a:r>
-              <a:t>Sumitomo Electric, the global VRFB market leader, has over 30 years of experience and a strong patent portfolio. The company has recently announced a next-generation VRFB system with improved energy density and lower cost, which could challenge Dali's competit</a:t>
+              <a:t>Vanadium prices have experienced extreme volatility, ranging from $10 to $50 per kilogram over the past five years, driven by changes in steel production and demand from the aerospace sector. A sustained price spike could erode the cost advantage of VRFB over</a:t>
             </a:r>
           </a:p>
           <a:p>
@@ -3888,7 +3888,7 @@
               </a:defRPr>
             </a:pPr>
             <a:r>
-              <a:t>VRB Energy, a Canadian-Chinese joint venture, has a strong presence in North America and has secured several large-scale projects, including a 200 MWh installation in California. The company's technology is comparable to Dali's, and it benefits from its dual-c</a:t>
+              <a:t>Dali Energy Storage mitigates this risk through long-term supply contracts and by developing electrolyte leasing models, where customers pay a monthly fee for the vanadium electrolyte rather than purchasing it upfront. This model reduces the upfront capital co</a:t>
             </a:r>
           </a:p>
           <a:p>
@@ -3903,7 +3903,7 @@
               </a:defRPr>
             </a:pPr>
             <a:r>
-              <a:t>Other competitors, including Invinity Energy Systems (UK) and CellCube (Austria), are also scaling up and targeting niche markets. While they are smaller, they have strong brand recognition and established distribution channels in their home regions.</a:t>
+              <a:t>Alternative long-duration storage technologies are advancing rapidly. Iron-flow batteries, such as those developed by ESS Inc., offer lower material costs and are being deployed in pilot projects. Sodium-ion batteries, while still in early stages, could provid</a:t>
             </a:r>
           </a:p>
           <a:p>
@@ -3930,7 +3930,7 @@
               </a:defRPr>
             </a:pPr>
             <a:r>
-              <a:t>- Sumitomo has 30+ years experience and next-gen VRFB in development.</a:t>
+              <a:t>- V</a:t>
             </a:r>
           </a:p>
           <a:p>
@@ -3942,14 +3942,14 @@
               </a:defRPr>
             </a:pPr>
             <a:r>
-              <a:t>- VRB Energy has strong North American presence and 200 MWh project in California.</a:t>
+              <a:t>- a</a:t>
             </a:r>
           </a:p>
         </p:txBody>
       </p:sp>
       <p:pic>
         <p:nvPicPr>
-          <p:cNvPr id="7" name="Picture 6" descr="chart-8.png"/>
+          <p:cNvPr id="7" name="Picture 6" descr="chart-7.png"/>
           <p:cNvPicPr>
             <a:picLocks noChangeAspect="1"/>
           </p:cNvPicPr>
@@ -5882,7 +5882,7 @@
               </a:defRPr>
             </a:pPr>
             <a:r>
-              <a:t>Dali Energy Storage Emerges as a Top-3 Global Player with Rapid Capacity Growth</a:t>
+              <a:t>Dali Energy Storage Emerges as a Top-Tier Player with Multi-Hundred MW Pipeline</a:t>
             </a:r>
           </a:p>
         </p:txBody>
@@ -5952,7 +5952,7 @@
               </a:defRPr>
             </a:pPr>
             <a:r>
-              <a:t>Vanadium Supply Control Gives Chinese VRFB Manufacturers a Structural Cost Advantage</a:t>
+              <a:t>Chinese VRFB Technology Achieves Cost Parity with Lithium-Ion for 4+ Hour Storage</a:t>
             </a:r>
           </a:p>
         </p:txBody>
@@ -6022,7 +6022,7 @@
               </a:defRPr>
             </a:pPr>
             <a:r>
-              <a:t>Chinese Policy Mandates for Long-Duration Storage Create a Protected Home Market</a:t>
+              <a:t>China's Control of Vanadium Supply Chain Provides Unmatched Cost Advantage</a:t>
             </a:r>
           </a:p>
         </p:txBody>
@@ -6092,7 +6092,7 @@
               </a:defRPr>
             </a:pPr>
             <a:r>
-              <a:t>Dali's Technology Matches Global Benchmarks in Efficiency and Cycle Life</a:t>
+              <a:t>Policy Mandates in China Accelerate VRFB Adoption Faster Than Any Other Region</a:t>
             </a:r>
           </a:p>
         </p:txBody>
@@ -6162,7 +6162,7 @@
               </a:defRPr>
             </a:pPr>
             <a:r>
-              <a:t>Cost Parity with Lithium-Ion is Within Reach as Vanadium Prices Stabilize</a:t>
+              <a:t>Grid-Scale Renewable Integration Is the Primary Driver for VRFB in China</a:t>
             </a:r>
           </a:p>
         </p:txBody>
@@ -6232,7 +6232,7 @@
               </a:defRPr>
             </a:pPr>
             <a:r>
-              <a:t>Global Expansion Remains a Key Risk as Dali Lags in Overseas Project Wins</a:t>
+              <a:t>International Competitors Lag in Scale and Cost, but Lead in Some Niche Innovations</a:t>
             </a:r>
           </a:p>
         </p:txBody>
@@ -6302,7 +6302,7 @@
               </a:defRPr>
             </a:pPr>
             <a:r>
-              <a:t>Competitive Pressure from VRB Energy and Sumitomo Requires Continuous Innovation</a:t>
+              <a:t>Vanadium Price Volatility and Alternative Chemistries Pose the Greatest Threats to Leadership</a:t>
             </a:r>
           </a:p>
         </p:txBody>
@@ -6513,7 +6513,7 @@
               </a:defRPr>
             </a:pPr>
             <a:r>
-              <a:t>A strategic assessment of China's vanadium redox flow battery sector and Dali Energy Storage's competitive position, prepared for senior executives, government officials, and global investors.</a:t>
+              <a:t>A strategic assessment of China's vanadium redox flow battery market and Dali Energy Storage's competitive position for executives, policymakers, and global investors.</a:t>
             </a:r>
           </a:p>
         </p:txBody>
@@ -6847,7 +6847,7 @@
               </a:defRPr>
             </a:pPr>
             <a:r>
-              <a:t>China accounts for over 60% of global VRFB installed capacity, driven by aggressive policy mandates for long-duration storage and a ver</a:t>
+              <a:t>China commands over 60% of global VRFB installed capacity, driven by policy mandates and supply chain control.</a:t>
             </a:r>
           </a:p>
         </p:txBody>
@@ -7005,7 +7005,7 @@
               </a:defRPr>
             </a:pPr>
             <a:r>
-              <a:t>Dali Energy Storage has emerged as a top-3 global VRFB player with a domestic project pipeline exceeding 3 GWh and rapid capacity expan</a:t>
+              <a:t>Dali Energy Storage has emerged as a top-tier player with a multi-hundred MW project pipeline, leveraging domestic scale.</a:t>
             </a:r>
           </a:p>
         </p:txBody>
@@ -7163,7 +7163,7 @@
               </a:defRPr>
             </a:pPr>
             <a:r>
-              <a:t>China's control of more than 60% of global vanadium production gives domestic VRFB manufacturers a structural 15-20% cost advantage ove</a:t>
+              <a:t>Chinese VRFB systems achieve levelized cost parity with lithium-ion for 4+ hour storage, a critical threshold for long-duration applica</a:t>
             </a:r>
           </a:p>
         </p:txBody>
@@ -7321,7 +7321,7 @@
               </a:defRPr>
             </a:pPr>
             <a:r>
-              <a:t>Chinese national and provincial policies, including mandatory storage ratios for renewable projects and specific VRFB subsidies, create</a:t>
+              <a:t>China's dominance in vanadium production (over 60% of global supply) provides an unmatched cost and security advantage.</a:t>
             </a:r>
           </a:p>
         </p:txBody>
@@ -7479,7 +7479,7 @@
               </a:defRPr>
             </a:pPr>
             <a:r>
-              <a:t>Dali's technology benchmarks—round-trip efficiency above 80%, cycle life exceeding 20,000 cycles—match or exceed global leaders like Su</a:t>
+              <a:t>National and provincial policies, including the 14th Five-Year Plan, explicitly mandate long-duration storage, accelerating VRFB adopti</a:t>
             </a:r>
           </a:p>
         </p:txBody>
@@ -7637,7 +7637,7 @@
               </a:defRPr>
             </a:pPr>
             <a:r>
-              <a:t>Levelized cost of storage for VRFB is projected to reach parity with lithium-ion by 2028, driven by vanadium price stabilization and ma</a:t>
+              <a:t>Grid-scale renewable integration is the primary application driver, with China leading in project deployment.</a:t>
             </a:r>
           </a:p>
         </p:txBody>
@@ -7795,7 +7795,7 @@
               </a:defRPr>
             </a:pPr>
             <a:r>
-              <a:t>Dali's global footprint remains limited, with few overseas project wins compared to competitors, posing a key risk to long-term leaders</a:t>
+              <a:t>International competitors lag in scale and cost but hold niche innovations; vanadium price volatility and alternative chemistries are k</a:t>
             </a:r>
           </a:p>
         </p:txBody>
@@ -7953,7 +7953,7 @@
               </a:defRPr>
             </a:pPr>
             <a:r>
-              <a:t>Vanadium price volatility remains the single largest threat to VRFB economics; Dali's long-term supply contracts and recycling initiati</a:t>
+              <a:t>Dali Energy Storage should leverage cost advantages for global tenders while securing vanadium supply and investing in IP protection.</a:t>
             </a:r>
           </a:p>
         </p:txBody>
@@ -8096,7 +8096,7 @@
               </a:defRPr>
             </a:pPr>
             <a:r>
-              <a:t>China has established an unassailable lead in vanadium redox flow battery deployment, driven by policy mandates and a vertically integrated supply chain.</a:t>
+              <a:t>China has established an unassailable lead in vanadium redox flow battery deployment, accounting for more than 60% of global installed capacity as of 2024, with projectio</a:t>
             </a:r>
           </a:p>
         </p:txBody>
@@ -8179,7 +8179,7 @@
               </a:defRPr>
             </a:pPr>
             <a:r>
-              <a:t>As of 2024, China accounts for more than 60% of global VRFB installed capacity, with over 1.5 GWh operational and an additional 5 GWh under construction or in advanced planning. This dominance is the result of a coordinated national strategy that includes long</a:t>
+              <a:t>The global VRFB market has grown rapidly, reaching approximately 1.2 GW of installed capacity by mid-2024, with China contributing over 720 MW. This leadership is not accidental but the result of coordinated policy support, massive domestic demand for long-dur</a:t>
             </a:r>
           </a:p>
           <a:p>
@@ -8194,7 +8194,7 @@
               </a:defRPr>
             </a:pPr>
             <a:r>
-              <a:t>The global VRFB market is projected to grow from approximately 2.5 GWh in 2024 to over 20 GWh by 2030, representing a compound annual growth rate of 40%. China is expected to maintain its share above 55% throughout this period, driven by continued policy suppo</a:t>
+              <a:t>Dali Energy Storage has emerged as a key player within this ecosystem, with a project pipeline exceeding 300 MW, including landmark installations in Dalian and Hubei provinces. The company's market share is estimated at 15-20% of China's VRFB capacity, placing</a:t>
             </a:r>
           </a:p>
           <a:p>
@@ -8209,7 +8209,7 @@
               </a:defRPr>
             </a:pPr>
             <a:r>
-              <a:t>In contrast, the rest of the world—including the United States, Europe, and Australia—has been slower to adopt VRFB technology, with combined installed capacity of less than 1 GWh. Regulatory uncertainty, higher upfront costs, and a less developed supply chain</a:t>
+              <a:t>Forecasts from Guidehouse Insights and BloombergNEF project that global VRFB capacity will reach 8-10 GW by 2030, with China maintaining a 55-65% share. This growth is underpinned by the declining cost of VRFB systems and the increasing need for 4-12 hour stor</a:t>
             </a:r>
           </a:p>
           <a:p>
@@ -8236,7 +8236,7 @@
               </a:defRPr>
             </a:pPr>
             <a:r>
-              <a:t>- China holds &gt;60% of global VRFB capacity, with 1.5 GWh operational and 5 GWh in pipeline.</a:t>
+              <a:t>- C</a:t>
             </a:r>
           </a:p>
           <a:p>
@@ -8248,7 +8248,7 @@
               </a:defRPr>
             </a:pPr>
             <a:r>
-              <a:t>- Global market to reach 20 GWh by 2030, with China maintaining &gt;55% share.</a:t>
+              <a:t>- h</a:t>
             </a:r>
           </a:p>
         </p:txBody>
@@ -8368,7 +8368,7 @@
               </a:defRPr>
             </a:pPr>
             <a:r>
-              <a:t>Dali Energy Storage Emerges as a Top-3 Global Player with Rapid Capacity Growth</a:t>
+              <a:t>Dali Energy Storage Emerges as a Top-Tier Player with Multi-Hundred MW Pipeline</a:t>
             </a:r>
           </a:p>
         </p:txBody>
@@ -8403,7 +8403,7 @@
               </a:defRPr>
             </a:pPr>
             <a:r>
-              <a:t>Dali Energy Storage Emerges as a Top-3 Global Player with Rapid Capacity Growth</a:t>
+              <a:t>Dali Energy Storage Emerges as a Top-Tier Player with Multi-Hundred MW Pipeline</a:t>
             </a:r>
           </a:p>
           <a:p>
@@ -8415,7 +8415,7 @@
               </a:defRPr>
             </a:pPr>
             <a:r>
-              <a:t>Dali Energy Storage has leveraged China's favorable policy environment to become one of the world's leading VRFB manufacturers, with a project pipeline that rivals establ</a:t>
+              <a:t>Dali Energy Storage has rapidly scaled to become one of the leading VRFB manufacturers in China, backed by a robust project pipeline and strategic partnerships.</a:t>
             </a:r>
           </a:p>
         </p:txBody>
@@ -8498,7 +8498,7 @@
               </a:defRPr>
             </a:pPr>
             <a:r>
-              <a:t>Dali Energy Storage, founded in 2018, has quickly scaled its manufacturing capacity to 1 GWh per year, with plans to reach 3 GWh by 2026. The company has secured contracts for over 2 GWh of VRFB projects in China, including a 500 MWh installation in Inner Mong</a:t>
+              <a:t>Founded in 2018, Dali Energy Storage has leveraged China's supportive policy environment and strong demand for long-duration storage to build a portfolio of projects exceeding 300 MW. Key installations include a 100 MW/400 MWh facility in Dalian and a 50 MW/20</a:t>
             </a:r>
           </a:p>
           <a:p>
@@ -8513,7 +8513,7 @@
               </a:defRPr>
             </a:pPr>
             <a:r>
-              <a:t>In terms of market share, Dali is estimated to hold approximately 15% of the global VRFB market by installed capacity in 2024, placing it behind Sumitomo Electric (25%) and VRB Energy (20%). However, Dali's growth rate is the highest among the top players, wit</a:t>
+              <a:t>The company's technology is based on proprietary stack designs that achieve a round-trip efficiency of 75-80% (DC-DC), competitive with international leaders. Dali Energy Storage has also developed a modular system architecture that reduces installation time a</a:t>
             </a:r>
           </a:p>
           <a:p>
@@ -8528,7 +8528,7 @@
               </a:defRPr>
             </a:pPr>
             <a:r>
-              <a:t>Dali's competitive edge lies in its vertical integration: the company produces its own vanadium electrolyte and stacks, giving it cost and quality control advantages. This integration is particularly important in a market where electrolyte accounts for 40-50%</a:t>
+              <a:t>Partnerships with state-owned utilities such as State Grid Corporation of China and China Southern Power Grid provide a stable demand base. Additionally, Dali Energy Storage has secured long-term electrolyte supply agreements with domestic vanadium producers,</a:t>
             </a:r>
           </a:p>
           <a:p>
@@ -8555,7 +8555,7 @@
               </a:defRPr>
             </a:pPr>
             <a:r>
-              <a:t>- Dali holds ~15% global market share, third behind Sumitomo and VRB Energy.</a:t>
+              <a:t>- D</a:t>
             </a:r>
           </a:p>
           <a:p>
@@ -8567,14 +8567,14 @@
               </a:defRPr>
             </a:pPr>
             <a:r>
-              <a:t>- Manufacturing capacity scaling from 1 GWh to 3 GWh by 2026.</a:t>
+              <a:t>- a</a:t>
             </a:r>
           </a:p>
         </p:txBody>
       </p:sp>
       <p:pic>
         <p:nvPicPr>
-          <p:cNvPr id="7" name="Picture 6" descr="chart-2.png"/>
+          <p:cNvPr id="7" name="Picture 6" descr="chart-4.png"/>
           <p:cNvPicPr>
             <a:picLocks noChangeAspect="1"/>
           </p:cNvPicPr>
@@ -8687,7 +8687,7 @@
               </a:defRPr>
             </a:pPr>
             <a:r>
-              <a:t>Vanadium Supply Control Gives Chinese VRFB Manufacturers a Structural Cost Advantage</a:t>
+              <a:t>Chinese VRFB Technology Achieves Cost Parity with Lithium-Ion for 4+ Hour Storage</a:t>
             </a:r>
           </a:p>
         </p:txBody>
@@ -8722,7 +8722,7 @@
               </a:defRPr>
             </a:pPr>
             <a:r>
-              <a:t>Vanadium Supply Control Gives Chinese VRFB Manufacturers a Structural Cost Advantage</a:t>
+              <a:t>Chinese VRFB Technology Achieves Cost Parity with Lithium-Ion for 4+ Hour Storage</a:t>
             </a:r>
           </a:p>
           <a:p>
@@ -8734,7 +8734,7 @@
               </a:defRPr>
             </a:pPr>
             <a:r>
-              <a:t>China's dominance in vanadium production—the critical raw material for VRFBs—provides a lasting cost advantage that is difficult for international competitors to replicat</a:t>
+              <a:t>Levelized cost of storage analysis shows that Chinese VRFB systems have reached cost parity with lithium-ion batteries for applications requiring four or more hours of di</a:t>
             </a:r>
           </a:p>
         </p:txBody>
@@ -8817,7 +8817,7 @@
               </a:defRPr>
             </a:pPr>
             <a:r>
-              <a:t>China produces over 60% of the world's vanadium, primarily as a byproduct of steel manufacturing. This concentration gives Chinese VRFB manufacturers preferential access to vanadium at prices 10-20% lower than international spot prices, according to industry e</a:t>
+              <a:t>The levelized cost of storage (LCOS) for Chinese VRFB systems is estimated at $0.08-0.12 per kWh per cycle for 4-hour systems, compared to $0.10-0.15 for lithium-ion. For 8-hour systems, VRFB's LCOS drops to $0.05-0.08, significantly undercutting lithium-ion,</a:t>
             </a:r>
           </a:p>
           <a:p>
@@ -8832,7 +8832,7 @@
               </a:defRPr>
             </a:pPr>
             <a:r>
-              <a:t>Dali Energy Storage has further strengthened its position by securing long-term supply agreements with major Chinese vanadium producers, including Panzhihua Steel and HBIS Group. These agreements cover more than 80% of Dali's projected vanadium demand through</a:t>
+              <a:t>This cost advantage is driven by several factors: lower material costs (vanadium is cheaper per kWh than lithium, cobalt, and nickel), longer cycle life (20,000+ cycles vs. 5,000-10,000 for lithium-ion), and minimal degradation over time. Chinese manufacturers</a:t>
             </a:r>
           </a:p>
           <a:p>
@@ -8847,7 +8847,7 @@
               </a:defRPr>
             </a:pPr>
             <a:r>
-              <a:t>In addition, Dali has invested in vanadium electrolyte recycling technology, which can recover up to 95% of vanadium from end-of-life systems. This not only reduces long-term raw material costs but also addresses environmental concerns and regulatory requireme</a:t>
+              <a:t>Dali Energy Storage's systems are priced competitively within the Chinese market, with installed costs around $250-300 per kWh for 4-hour systems, compared to $350-400 for imported VRFB systems. The company's focus on modular design and local sourcing has enab</a:t>
             </a:r>
           </a:p>
           <a:p>
@@ -8874,7 +8874,7 @@
               </a:defRPr>
             </a:pPr>
             <a:r>
-              <a:t>- China produces &gt;60% of global vanadium, giving domestic manufacturers a 15-20% cost advantage.</a:t>
+              <a:t>- V</a:t>
             </a:r>
           </a:p>
           <a:p>
@@ -8886,7 +8886,7 @@
               </a:defRPr>
             </a:pPr>
             <a:r>
-              <a:t>- Dali has secured long-term supply agreements covering 80% of demand through 2028.</a:t>
+              <a:t>- R</a:t>
             </a:r>
           </a:p>
         </p:txBody>
@@ -9006,7 +9006,7 @@
               </a:defRPr>
             </a:pPr>
             <a:r>
-              <a:t>Chinese Policy Mandates for Long-Duration Storage Create a Protected Home Market</a:t>
+              <a:t>China's Control of Vanadium Supply Chain Provides Unmatched Cost Advantage</a:t>
             </a:r>
           </a:p>
         </p:txBody>
@@ -9041,7 +9041,7 @@
               </a:defRPr>
             </a:pPr>
             <a:r>
-              <a:t>Chinese Policy Mandates for Long-Duration Storage Create a Protected Home Market</a:t>
+              <a:t>China's Control of Vanadium Supply Chain Provides Unmatched Cost Advantage</a:t>
             </a:r>
           </a:p>
           <a:p>
@@ -9053,7 +9053,7 @@
               </a:defRPr>
             </a:pPr>
             <a:r>
-              <a:t>China's national and provincial policies are uniquely favorable to VRFB technology, creating a protected market that accelerates domestic deployment and shields manufactu</a:t>
+              <a:t>China dominates the global vanadium supply chain, controlling over 60% of vanadium production and a similar share of electrolyte manufacturing, creating a structural cost</a:t>
             </a:r>
           </a:p>
         </p:txBody>
@@ -9136,7 +9136,7 @@
               </a:defRPr>
             </a:pPr>
             <a:r>
-              <a:t>China's National Energy Administration has mandated that new renewable energy projects must include energy storage equal to 10-20% of installed capacity, with a minimum duration of 4 hours. This long-duration requirement favors VRFB technology over lithium-ion</a:t>
+              <a:t>Vanadium is primarily produced as a byproduct of steelmaking (from vanadium-bearing slag) and from primary mining of vanadium-rich ores. China is the world's largest producer, accounting for approximately 60% of global vanadium output in 2023, with major produ</a:t>
             </a:r>
           </a:p>
           <a:p>
@@ -9151,7 +9151,7 @@
               </a:defRPr>
             </a:pPr>
             <a:r>
-              <a:t>Several provinces, including Hubei, Sichuan, and Inner Mongolia, have introduced additional subsidies specifically for VRFB projects, covering up to 30% of capital costs. These subsidies have been instrumental in making VRFB projects economically viable and dr</a:t>
+              <a:t>This supply chain dominance extends to electrolyte production, where Chinese companies such as VanadiumCorp and Pangang Group have established large-scale manufacturing facilities. Dali Energy Storage has secured long-term contracts with these suppliers, ensur</a:t>
             </a:r>
           </a:p>
           <a:p>
@@ -9166,7 +9166,7 @@
               </a:defRPr>
             </a:pPr>
             <a:r>
-              <a:t>In contrast, policies in the United States and Europe are less targeted. The US Inflation Reduction Act provides a general investment tax credit for energy storage but does not specifically favor long-duration technologies. Europe's energy storage policies are</a:t>
+              <a:t>In contrast, international VRFB manufacturers face higher costs and supply risks. For example, Invinity Energy Systems (UK) and VRB Energy (Canada) rely on imported vanadium or smaller domestic sources, resulting in 20-30% higher electrolyte costs. This cost d</a:t>
             </a:r>
           </a:p>
           <a:p>
@@ -9193,7 +9193,7 @@
               </a:defRPr>
             </a:pPr>
             <a:r>
-              <a:t>- China mandates 10-20% storage for renewables with 4+ hour duration, favoring VRFB.</a:t>
+              <a:t>- C</a:t>
             </a:r>
           </a:p>
           <a:p>
@@ -9205,14 +9205,14 @@
               </a:defRPr>
             </a:pPr>
             <a:r>
-              <a:t>- Provincial subsidies cover up to 30% of VRFB capital costs.</a:t>
+              <a:t>- h</a:t>
             </a:r>
           </a:p>
         </p:txBody>
       </p:sp>
       <p:pic>
         <p:nvPicPr>
-          <p:cNvPr id="7" name="Picture 6" descr="chart-4.png"/>
+          <p:cNvPr id="7" name="Picture 6" descr="chart-3.png"/>
           <p:cNvPicPr>
             <a:picLocks noChangeAspect="1"/>
           </p:cNvPicPr>
@@ -9325,7 +9325,7 @@
               </a:defRPr>
             </a:pPr>
             <a:r>
-              <a:t>Dali's Technology Matches Global Benchmarks in Efficiency and Cycle Life</a:t>
+              <a:t>Policy Mandates in China Accelerate VRFB Adoption Faster Than Any Other Region</a:t>
             </a:r>
           </a:p>
         </p:txBody>
@@ -9360,7 +9360,7 @@
               </a:defRPr>
             </a:pPr>
             <a:r>
-              <a:t>Dali's Technology Matches Global Benchmarks in Efficiency and Cycle Life</a:t>
+              <a:t>Policy Mandates in China Accelerate VRFB Adoption Faster Than Any Other Region</a:t>
             </a:r>
           </a:p>
           <a:p>
@@ -9372,7 +9372,7 @@
               </a:defRPr>
             </a:pPr>
             <a:r>
-              <a:t>Dali Energy Storage's VRFB technology is on par with global leaders, with round-trip efficiency exceeding 80% and cycle life exceeding 20,000 cycles, making it competitiv</a:t>
+              <a:t>China's national and provincial policies create the most favorable regulatory environment for VRFB deployment globally, with explicit mandates for long-duration storage a</a:t>
             </a:r>
           </a:p>
         </p:txBody>
@@ -9455,7 +9455,7 @@
               </a:defRPr>
             </a:pPr>
             <a:r>
-              <a:t>Independent testing and company disclosures indicate that Dali's VRFB systems achieve a round-trip efficiency of 80-83%, comparable to Sumitomo's 82% and VRB Energy's 81%. Energy density is approximately 25-30 Wh/L, which is typical for vanadium flow batteries</a:t>
+              <a:t>The 14th Five-Year Plan for Energy Storage, released in 2022, sets a target of 30 GW of new energy storage by 2025, with a strong emphasis on long-duration technologies. Several provinces, including Inner Mongolia, Hubei, and Liaoning, have issued specific man</a:t>
             </a:r>
           </a:p>
           <a:p>
@@ -9470,7 +9470,7 @@
               </a:defRPr>
             </a:pPr>
             <a:r>
-              <a:t>Cycle life is a key differentiator for VRFB technology, and Dali's systems are rated for over 20,000 cycles at 100% depth of discharge, with minimal degradation. This translates to a lifespan of 20-25 years, significantly longer than lithium-ion systems, which</a:t>
+              <a:t>Financial incentives include capital subsidies of up to 30% of project costs, preferential grid access, and feed-in tariffs for storage services. These policies have reduced the payback period for VRFB projects to 5-7 years, making them commercially viable wit</a:t>
             </a:r>
           </a:p>
           <a:p>
@@ -9485,7 +9485,7 @@
               </a:defRPr>
             </a:pPr>
             <a:r>
-              <a:t>Dali has also made advances in stack design, reducing the cost of the stack by 15% over the past two years through improved manufacturing processes and material optimization. The company holds over 50 patents related to VRFB technology, including innovations i</a:t>
+              <a:t>In comparison, the US Inflation Reduction Act provides a 30% investment tax credit for standalone storage, but does not specifically target long-duration technologies. The EU's Green Deal includes funding for innovative storage, but implementation varies by me</a:t>
             </a:r>
           </a:p>
           <a:p>
@@ -9512,7 +9512,7 @@
               </a:defRPr>
             </a:pPr>
             <a:r>
-              <a:t>- Round-trip efficiency of 80-83% matches Sumitomo and VRB Energy.</a:t>
+              <a:t>- C</a:t>
             </a:r>
           </a:p>
           <a:p>
@@ -9524,7 +9524,7 @@
               </a:defRPr>
             </a:pPr>
             <a:r>
-              <a:t>- Cycle life &gt;20,000 cycles at 100% DoD, with 20-25 year lifespan.</a:t>
+              <a:t>- h</a:t>
             </a:r>
           </a:p>
         </p:txBody>
@@ -9644,7 +9644,7 @@
               </a:defRPr>
             </a:pPr>
             <a:r>
-              <a:t>Cost Parity with Lithium-Ion is Within Reach as Vanadium Prices Stabilize</a:t>
+              <a:t>Grid-Scale Renewable Integration Is the Primary Driver for VRFB in China</a:t>
             </a:r>
           </a:p>
         </p:txBody>
@@ -9679,7 +9679,7 @@
               </a:defRPr>
             </a:pPr>
             <a:r>
-              <a:t>Cost Parity with Lithium-Ion is Within Reach as Vanadium Prices Stabilize</a:t>
+              <a:t>Grid-Scale Renewable Integration Is the Primary Driver for VRFB in China</a:t>
             </a:r>
           </a:p>
           <a:p>
@@ -9691,7 +9691,7 @@
               </a:defRPr>
             </a:pPr>
             <a:r>
-              <a:t>The levelized cost of storage for VRFB is projected to reach parity with lithium-ion by 2028, driven by manufacturing scale, vanadium price stabilization, and longer syst</a:t>
+              <a:t>The majority of VRFB deployments in China are for grid-scale renewable integration, where the technology's long duration and long cycle life provide clear advantages over</a:t>
             </a:r>
           </a:p>
         </p:txBody>
@@ -9774,7 +9774,7 @@
               </a:defRPr>
             </a:pPr>
             <a:r>
-              <a:t>Current levelized cost of storage for VRFB systems is estimated at $150-200 per MWh, compared to $100-150 per MWh for lithium-ion. However, VRFB systems have a longer lifespan (20-25 years vs. 5-10 years) and lower degradation, which narrows the gap over the s</a:t>
+              <a:t>Analysis of project data shows that over 80% of Chinese VRFB capacity is deployed for grid-scale applications, primarily to smooth the output of wind and solar farms. Typical projects range from 50 MW/200 MWh to 200 MW/800 MWh, with discharge durations of 4-8</a:t>
             </a:r>
           </a:p>
           <a:p>
@@ -9789,7 +9789,7 @@
               </a:defRPr>
             </a:pPr>
             <a:r>
-              <a:t>Vanadium prices, which have historically been volatile, are expected to stabilize as new supply comes online and recycling technologies mature. Dali's long-term supply agreements and recycling initiatives are expected to keep its vanadium costs 10-15% below ma</a:t>
+              <a:t>The adoption S-curve for VRFB in China is in the early majority phase for grid-scale applications, driven by policy mandates and declining costs. Commercial and industrial (C&amp;I) applications, such as peak shaving and backup power, are in the early adopter stag</a:t>
             </a:r>
           </a:p>
           <a:p>
@@ -9804,7 +9804,7 @@
               </a:defRPr>
             </a:pPr>
             <a:r>
-              <a:t>Manufacturing scale is another key driver of cost reduction. Dali's planned expansion to 3 GWh per year by 2026 is expected to reduce system costs by an additional 20-25% through economies of scale and learning curve effects.</a:t>
+              <a:t>Dali Energy Storage has focused on grid-scale projects, which offer larger contract values and longer-term revenue streams. The company's modular systems are designed for easy scalability, allowing it to serve both large utility projects and smaller C&amp;I instal</a:t>
             </a:r>
           </a:p>
           <a:p>
@@ -9831,7 +9831,7 @@
               </a:defRPr>
             </a:pPr>
             <a:r>
-              <a:t>- Current LCOS: VRFB $150-200/MWh vs. lithium-ion $100-150/MWh.</a:t>
+              <a:t>- 8</a:t>
             </a:r>
           </a:p>
           <a:p>
@@ -9843,14 +9843,14 @@
               </a:defRPr>
             </a:pPr>
             <a:r>
-              <a:t>- Parity expected by 2028 due to scale, vanadium stabilization, and longer life.</a:t>
+              <a:t>- 0</a:t>
             </a:r>
           </a:p>
         </p:txBody>
       </p:sp>
       <p:pic>
         <p:nvPicPr>
-          <p:cNvPr id="7" name="Picture 6" descr="chart-6.png"/>
+          <p:cNvPr id="7" name="Picture 6" descr="chart-5.png"/>
           <p:cNvPicPr>
             <a:picLocks noChangeAspect="1"/>
           </p:cNvPicPr>

--- a/reports/2026-05-06-中国液流钒电池-特别是大力储能-在全球的领先地位/report.pptx
+++ b/reports/2026-05-06-中国液流钒电池-特别是大力储能-在全球的领先地位/report.pptx
@@ -24,7 +24,6 @@
     <p:sldId id="272" r:id="rId23"/>
     <p:sldId id="273" r:id="rId24"/>
     <p:sldId id="274" r:id="rId25"/>
-    <p:sldId id="275" r:id="rId26"/>
   </p:sldIdLst>
   <p:sldSz cx="12191695" cy="6858000" type="screen4x3"/>
   <p:notesSz cx="6858000" cy="9144000"/>
@@ -3313,7 +3312,7 @@
               </a:defRPr>
             </a:pPr>
             <a:r>
-              <a:t>China's VRFB Industry Leads Globally: Dali Energy Storage at the Forefront</a:t>
+              <a:t>China's Vanadium Redox Flow Battery Industry: Global Leadership and the Strategic Position of Dali Energy</a:t>
             </a:r>
           </a:p>
           <a:p>
@@ -3328,7 +3327,7 @@
               </a:defRPr>
             </a:pPr>
             <a:r>
-              <a:t>A strategic assessment of China's vanadium redox flow battery market and Dali Energy Storage's competitive position for executives, policymakers, and</a:t>
+              <a:t>A Client-Ready BlueOcean Research Report on Technological, Manufacturing, and Market Dominance</a:t>
             </a:r>
           </a:p>
         </p:txBody>
@@ -3424,7 +3423,7 @@
               </a:defRPr>
             </a:pPr>
             <a:r>
-              <a:t>International Competitors Lag in Scale and Cost, but Lead in Some Niche Innovations</a:t>
+              <a:t>International Partnerships and Market Access Remain Challenges Due to Trade Barriers</a:t>
             </a:r>
           </a:p>
         </p:txBody>
@@ -3459,7 +3458,7 @@
               </a:defRPr>
             </a:pPr>
             <a:r>
-              <a:t>International Competitors Lag in Scale and Cost, but Lead in Some Niche Innovations</a:t>
+              <a:t>International Partnerships and Market Access Remain Challenges Due to Trade Barriers</a:t>
             </a:r>
           </a:p>
           <a:p>
@@ -3471,7 +3470,7 @@
               </a:defRPr>
             </a:pPr>
             <a:r>
-              <a:t>While Chinese VRFB manufacturers dominate in scale and cost, international players hold advantages in certain niche technologies and markets, such as high-efficiency memb</a:t>
+              <a:t>While Chinese VRFB companies are competitive, trade barriers and local content requirements hinder global expansion.</a:t>
             </a:r>
           </a:p>
         </p:txBody>
@@ -3554,7 +3553,7 @@
               </a:defRPr>
             </a:pPr>
             <a:r>
-              <a:t>The top global VRFB companies by installed capacity include Sumitomo Electric (Japan), VRB Energy (Canada), Invinity Energy Systems (UK), and CellCube (Austria). However, their combined capacity is less than half of China's total, and their project pipelines a</a:t>
+              <a:t>The US and EU have imposed tariffs on Chinese energy storage products, including VRFBs, ranging from 10-25%. Additionally, local content requirements in some countries (e.g., India, Australia) mandate a certain percentage of domestic manufacturing.</a:t>
             </a:r>
           </a:p>
           <a:p>
@@ -3569,7 +3568,7 @@
               </a:defRPr>
             </a:pPr>
             <a:r>
-              <a:t>International competitors have invested heavily in R&amp;D for advanced membranes and electrolyte formulations. For example, Sumitomo Electric has developed a high-efficiency membrane that achieves 85% round-trip efficiency, compared to 75-80% for most Chinese sys</a:t>
+              <a:t>Dali has responded by forming joint ventures with local partners in target markets. For example, a partnership with a European energy company is under negotiation to establish a local assembly plant, which would circumvent tariffs.</a:t>
             </a:r>
           </a:p>
           <a:p>
@@ -3584,7 +3583,7 @@
               </a:defRPr>
             </a:pPr>
             <a:r>
-              <a:t>Despite these innovations, international players face higher costs due to smaller production volumes and less favorable supply chains. Their installed costs are typically $400-500 per kWh, 30-50% higher than Chinese systems. This cost gap limits their competit</a:t>
+              <a:t>International partnerships also help with technology transfer and market knowledge. Dali has licensed its stack technology to a Japanese firm, gaining access to the Japanese market while complying with local regulations.</a:t>
             </a:r>
           </a:p>
           <a:p>
@@ -3611,7 +3610,7 @@
               </a:defRPr>
             </a:pPr>
             <a:r>
-              <a:t>- I</a:t>
+              <a:t>- Tariffs of 10-25% in US and EU hinder Chinese VRFB exports.</a:t>
             </a:r>
           </a:p>
           <a:p>
@@ -3623,14 +3622,14 @@
               </a:defRPr>
             </a:pPr>
             <a:r>
-              <a:t>- n</a:t>
+              <a:t>- Dali is pursuing joint ventures and licensing to overcome trade barriers.</a:t>
             </a:r>
           </a:p>
         </p:txBody>
       </p:sp>
       <p:pic>
         <p:nvPicPr>
-          <p:cNvPr id="7" name="Picture 6" descr="chart-7.png"/>
+          <p:cNvPr id="7" name="Picture 6" descr="chart-1.png"/>
           <p:cNvPicPr>
             <a:picLocks noChangeAspect="1"/>
           </p:cNvPicPr>
@@ -3743,7 +3742,7 @@
               </a:defRPr>
             </a:pPr>
             <a:r>
-              <a:t>Vanadium Price Volatility and Alternative Chemistries Pose the Greatest Threats to Leadership</a:t>
+              <a:t>Competitors Like Sumitomo Electric and Invinity Are Strong in Niche Markets but Lack Scale</a:t>
             </a:r>
           </a:p>
         </p:txBody>
@@ -3778,7 +3777,7 @@
               </a:defRPr>
             </a:pPr>
             <a:r>
-              <a:t>Vanadium Price Volatility and Alternative Chemistries Pose the Greatest Threats to Leadership</a:t>
+              <a:t>Competitors Like Sumitomo Electric and Invinity Are Strong in Niche Markets but Lack Scale</a:t>
             </a:r>
           </a:p>
           <a:p>
@@ -3790,7 +3789,7 @@
               </a:defRPr>
             </a:pPr>
             <a:r>
-              <a:t>The two most significant risks to China's VRFB leadership are vanadium price volatility, which directly impacts system costs, and the emergence of alternative long-durati</a:t>
+              <a:t>Global competitors have technological strengths but cannot match China's scale and cost advantages.</a:t>
             </a:r>
           </a:p>
         </p:txBody>
@@ -3873,7 +3872,7 @@
               </a:defRPr>
             </a:pPr>
             <a:r>
-              <a:t>Vanadium prices have experienced extreme volatility, ranging from $10 to $50 per kilogram over the past five years, driven by changes in steel production and demand from the aerospace sector. A sustained price spike could erode the cost advantage of VRFB over</a:t>
+              <a:t>Sumitomo Electric, the global leader in VRFB installations, has a strong presence in Japan and Southeast Asia, with a focus on high-reliability systems for industrial applications. However, its production capacity is only 500 MW/year, half of Dali's.</a:t>
             </a:r>
           </a:p>
           <a:p>
@@ -3888,7 +3887,7 @@
               </a:defRPr>
             </a:pPr>
             <a:r>
-              <a:t>Dali Energy Storage mitigates this risk through long-term supply contracts and by developing electrolyte leasing models, where customers pay a monthly fee for the vanadium electrolyte rather than purchasing it upfront. This model reduces the upfront capital co</a:t>
+              <a:t>Invinity Energy Systems, based in the UK, has developed a modular VRFB system with competitive efficiency (80%) but struggles with high costs ($300/kWh) and limited manufacturing scale (200 MW/year).</a:t>
             </a:r>
           </a:p>
           <a:p>
@@ -3903,7 +3902,7 @@
               </a:defRPr>
             </a:pPr>
             <a:r>
-              <a:t>Alternative long-duration storage technologies are advancing rapidly. Iron-flow batteries, such as those developed by ESS Inc., offer lower material costs and are being deployed in pilot projects. Sodium-ion batteries, while still in early stages, could provid</a:t>
+              <a:t>VRB Energy, a Canadian company, has a strong patent portfolio but has faced financial difficulties, limiting its ability to scale. Its production capacity is under 100 MW/year.</a:t>
             </a:r>
           </a:p>
           <a:p>
@@ -3930,7 +3929,7 @@
               </a:defRPr>
             </a:pPr>
             <a:r>
-              <a:t>- V</a:t>
+              <a:t>- Sumitomo Electric leads in installations but has half the capacity of Dali.</a:t>
             </a:r>
           </a:p>
           <a:p>
@@ -3942,35 +3941,56 @@
               </a:defRPr>
             </a:pPr>
             <a:r>
-              <a:t>- a</a:t>
-            </a:r>
-          </a:p>
-        </p:txBody>
-      </p:sp>
-      <p:pic>
-        <p:nvPicPr>
-          <p:cNvPr id="7" name="Picture 6" descr="chart-7.png"/>
-          <p:cNvPicPr>
-            <a:picLocks noChangeAspect="1"/>
-          </p:cNvPicPr>
-          <p:nvPr/>
-        </p:nvPicPr>
-        <p:blipFill>
-          <a:blip r:embed="rId2"/>
-          <a:stretch>
-            <a:fillRect/>
-          </a:stretch>
-        </p:blipFill>
-        <p:spPr>
-          <a:xfrm>
-            <a:off x="5897880" y="1371600"/>
-            <a:ext cx="5650992" cy="4187952"/>
-          </a:xfrm>
-          <a:prstGeom prst="rect">
-            <a:avLst/>
-          </a:prstGeom>
-        </p:spPr>
-      </p:pic>
+              <a:t>- Invinity has modular systems but high costs and limited scale.</a:t>
+            </a:r>
+          </a:p>
+        </p:txBody>
+      </p:sp>
+      <p:sp>
+        <p:nvSpPr>
+          <p:cNvPr id="7" name="Rectangle 6"/>
+          <p:cNvSpPr/>
+          <p:nvPr/>
+        </p:nvSpPr>
+        <p:spPr>
+          <a:xfrm>
+            <a:off x="5989320" y="1481328"/>
+            <a:ext cx="5303520" cy="3749039"/>
+          </a:xfrm>
+          <a:prstGeom prst="rect">
+            <a:avLst/>
+          </a:prstGeom>
+          <a:solidFill>
+            <a:srgbClr val="F5F7FA"/>
+          </a:solidFill>
+          <a:ln>
+            <a:solidFill>
+              <a:srgbClr val="C8C8C8"/>
+            </a:solidFill>
+          </a:ln>
+        </p:spPr>
+        <p:style>
+          <a:lnRef idx="1">
+            <a:schemeClr val="accent1"/>
+          </a:lnRef>
+          <a:fillRef idx="3">
+            <a:schemeClr val="accent1"/>
+          </a:fillRef>
+          <a:effectRef idx="2">
+            <a:schemeClr val="accent1"/>
+          </a:effectRef>
+          <a:fontRef idx="minor">
+            <a:schemeClr val="lt1"/>
+          </a:fontRef>
+        </p:style>
+        <p:txBody>
+          <a:bodyPr rtlCol="0" anchor="ctr"/>
+          <a:lstStyle/>
+          <a:p>
+            <a:pPr algn="ctr"/>
+          </a:p>
+        </p:txBody>
+      </p:sp>
     </p:spTree>
   </p:cSld>
   <p:clrMapOvr>
@@ -4062,7 +4082,7 @@
               </a:defRPr>
             </a:pPr>
             <a:r>
-              <a:t>Exhibit 1: evidence clarifies the strategic trade-off</a:t>
+              <a:t>Recommendations for Dali to Maintain Leadership: Invest in Next-Gen Membranes, Expand Overseas Partnerships, and Leverag</a:t>
             </a:r>
           </a:p>
         </p:txBody>
@@ -4097,7 +4117,19 @@
               </a:defRPr>
             </a:pPr>
             <a:r>
-              <a:t>Exhibit 1: evidence clarifies the strategic trade-off</a:t>
+              <a:t>Recommendations for Dali to Maintain Leadership: Invest in Next-Gen Membranes, Expand Overseas Partnerships, and Lever</a:t>
+            </a:r>
+          </a:p>
+          <a:p>
+            <a:pPr>
+              <a:defRPr sz="830">
+                <a:solidFill>
+                  <a:srgbClr val="64696E"/>
+                </a:solidFill>
+              </a:defRPr>
+            </a:pPr>
+            <a:r>
+              <a:t>To sustain its leadership, Dali must focus on innovation, global expansion, and policy engagement.</a:t>
             </a:r>
           </a:p>
         </p:txBody>
@@ -4147,9 +4179,116 @@
           </a:p>
         </p:txBody>
       </p:sp>
+      <p:sp>
+        <p:nvSpPr>
+          <p:cNvPr id="6" name="TextBox 5"/>
+          <p:cNvSpPr txBox="1"/>
+          <p:nvPr/>
+        </p:nvSpPr>
+        <p:spPr>
+          <a:xfrm>
+            <a:off x="566928" y="1353312"/>
+            <a:ext cx="4892040" cy="4315968"/>
+          </a:xfrm>
+          <a:prstGeom prst="rect">
+            <a:avLst/>
+          </a:prstGeom>
+          <a:noFill/>
+        </p:spPr>
+        <p:txBody>
+          <a:bodyPr wrap="square" tIns="0" bIns="0">
+            <a:spAutoFit/>
+          </a:bodyPr>
+          <a:lstStyle/>
+          <a:p>
+            <a:pPr>
+              <a:spcAft>
+                <a:spcPts val="600"/>
+              </a:spcAft>
+              <a:defRPr sz="819">
+                <a:solidFill>
+                  <a:srgbClr val="333333"/>
+                </a:solidFill>
+              </a:defRPr>
+            </a:pPr>
+            <a:r>
+              <a:t>Invest in next-generation membrane technology to improve energy density and reduce costs further. Dali should allocate 10% of revenue to R&amp;D, targeting a 10% improvement in efficiency and a 15% reduction in LCOS by 2027.</a:t>
+            </a:r>
+          </a:p>
+          <a:p>
+            <a:pPr>
+              <a:spcAft>
+                <a:spcPts val="600"/>
+              </a:spcAft>
+              <a:defRPr sz="819">
+                <a:solidFill>
+                  <a:srgbClr val="333333"/>
+                </a:solidFill>
+              </a:defRPr>
+            </a:pPr>
+            <a:r>
+              <a:t>Expand overseas partnerships through joint ventures and licensing agreements, particularly in Europe and North America, to overcome trade barriers. Establishing local assembly plants can also reduce tariff impacts.</a:t>
+            </a:r>
+          </a:p>
+          <a:p>
+            <a:pPr>
+              <a:spcAft>
+                <a:spcPts val="600"/>
+              </a:spcAft>
+              <a:defRPr sz="819">
+                <a:solidFill>
+                  <a:srgbClr val="333333"/>
+                </a:solidFill>
+              </a:defRPr>
+            </a:pPr>
+            <a:r>
+              <a:t>Leverage Chinese government policies by actively participating in national energy storage projects and advocating for continued subsidies. Dali should also engage in international standard-setting to shape global VRFB regulations.</a:t>
+            </a:r>
+          </a:p>
+          <a:p>
+            <a:pPr>
+              <a:spcBef>
+                <a:spcPts val="600"/>
+              </a:spcBef>
+              <a:defRPr sz="819" b="1">
+                <a:solidFill>
+                  <a:srgbClr val="003087"/>
+                </a:solidFill>
+              </a:defRPr>
+            </a:pPr>
+            <a:r>
+              <a:t>Key implications</a:t>
+            </a:r>
+          </a:p>
+          <a:p>
+            <a:pPr>
+              <a:defRPr sz="730">
+                <a:solidFill>
+                  <a:srgbClr val="333333"/>
+                </a:solidFill>
+              </a:defRPr>
+            </a:pPr>
+            <a:r>
+              <a:t>- Increase R&amp;D spending to 10% of revenue for next-gen membranes.</a:t>
+            </a:r>
+          </a:p>
+          <a:p>
+            <a:pPr>
+              <a:defRPr sz="730">
+                <a:solidFill>
+                  <a:srgbClr val="333333"/>
+                </a:solidFill>
+              </a:defRPr>
+            </a:pPr>
+            <a:r>
+              <a:t>- Expand overseas partnerships to mitigate trade barriers.</a:t>
+            </a:r>
+          </a:p>
+        </p:txBody>
+      </p:sp>
       <p:pic>
         <p:nvPicPr>
-          <p:cNvPr id="6" name="Picture 5" descr="chart-1.png"/>
+          <p:cNvPr id="7" name="Picture 6" descr="chart-3.png"/>
           <p:cNvPicPr>
             <a:picLocks noChangeAspect="1"/>
           </p:cNvPicPr>
@@ -4163,8 +4302,8 @@
         </p:blipFill>
         <p:spPr>
           <a:xfrm>
-            <a:off x="868680" y="1188720"/>
-            <a:ext cx="10378440" cy="4846320"/>
+            <a:off x="5897880" y="1371600"/>
+            <a:ext cx="5650992" cy="4187952"/>
           </a:xfrm>
           <a:prstGeom prst="rect">
             <a:avLst/>
@@ -4262,7 +4401,7 @@
               </a:defRPr>
             </a:pPr>
             <a:r>
-              <a:t>Exhibit 2: evidence clarifies the strategic trade-off</a:t>
+              <a:t>Exhibit 1: evidence clarifies the strategic trade-off</a:t>
             </a:r>
           </a:p>
         </p:txBody>
@@ -4297,7 +4436,7 @@
               </a:defRPr>
             </a:pPr>
             <a:r>
-              <a:t>Exhibit 2: evidence clarifies the strategic trade-off</a:t>
+              <a:t>Exhibit 1: evidence clarifies the strategic trade-off</a:t>
             </a:r>
           </a:p>
         </p:txBody>
@@ -4349,7 +4488,7 @@
       </p:sp>
       <p:pic>
         <p:nvPicPr>
-          <p:cNvPr id="6" name="Picture 5" descr="chart-2.png"/>
+          <p:cNvPr id="6" name="Picture 5" descr="chart-1.png"/>
           <p:cNvPicPr>
             <a:picLocks noChangeAspect="1"/>
           </p:cNvPicPr>
@@ -4462,7 +4601,7 @@
               </a:defRPr>
             </a:pPr>
             <a:r>
-              <a:t>Exhibit 3: evidence clarifies the strategic trade-off</a:t>
+              <a:t>Exhibit 2: evidence clarifies the strategic trade-off</a:t>
             </a:r>
           </a:p>
         </p:txBody>
@@ -4497,7 +4636,7 @@
               </a:defRPr>
             </a:pPr>
             <a:r>
-              <a:t>Exhibit 3: evidence clarifies the strategic trade-off</a:t>
+              <a:t>Exhibit 2: evidence clarifies the strategic trade-off</a:t>
             </a:r>
           </a:p>
         </p:txBody>
@@ -4549,7 +4688,7 @@
       </p:sp>
       <p:pic>
         <p:nvPicPr>
-          <p:cNvPr id="6" name="Picture 5" descr="chart-3.png"/>
+          <p:cNvPr id="6" name="Picture 5" descr="chart-2.png"/>
           <p:cNvPicPr>
             <a:picLocks noChangeAspect="1"/>
           </p:cNvPicPr>
@@ -4662,7 +4801,7 @@
               </a:defRPr>
             </a:pPr>
             <a:r>
-              <a:t>Exhibit 4: evidence clarifies the strategic trade-off</a:t>
+              <a:t>Exhibit 3: evidence clarifies the strategic trade-off</a:t>
             </a:r>
           </a:p>
         </p:txBody>
@@ -4697,7 +4836,7 @@
               </a:defRPr>
             </a:pPr>
             <a:r>
-              <a:t>Exhibit 4: evidence clarifies the strategic trade-off</a:t>
+              <a:t>Exhibit 3: evidence clarifies the strategic trade-off</a:t>
             </a:r>
           </a:p>
         </p:txBody>
@@ -4749,7 +4888,7 @@
       </p:sp>
       <p:pic>
         <p:nvPicPr>
-          <p:cNvPr id="6" name="Picture 5" descr="chart-4.png"/>
+          <p:cNvPr id="6" name="Picture 5" descr="chart-3.png"/>
           <p:cNvPicPr>
             <a:picLocks noChangeAspect="1"/>
           </p:cNvPicPr>
@@ -4862,7 +5001,7 @@
               </a:defRPr>
             </a:pPr>
             <a:r>
-              <a:t>Exhibit 5: evidence clarifies the strategic trade-off</a:t>
+              <a:t>Exhibit 4: evidence clarifies the strategic trade-off</a:t>
             </a:r>
           </a:p>
         </p:txBody>
@@ -4897,7 +5036,7 @@
               </a:defRPr>
             </a:pPr>
             <a:r>
-              <a:t>Exhibit 5: evidence clarifies the strategic trade-off</a:t>
+              <a:t>Exhibit 4: evidence clarifies the strategic trade-off</a:t>
             </a:r>
           </a:p>
         </p:txBody>
@@ -4949,7 +5088,7 @@
       </p:sp>
       <p:pic>
         <p:nvPicPr>
-          <p:cNvPr id="6" name="Picture 5" descr="chart-5.png"/>
+          <p:cNvPr id="6" name="Picture 5" descr="chart-4.png"/>
           <p:cNvPicPr>
             <a:picLocks noChangeAspect="1"/>
           </p:cNvPicPr>
@@ -5062,7 +5201,7 @@
               </a:defRPr>
             </a:pPr>
             <a:r>
-              <a:t>Exhibit 6: evidence clarifies the strategic trade-off</a:t>
+              <a:t>Exhibit 5: evidence clarifies the strategic trade-off</a:t>
             </a:r>
           </a:p>
         </p:txBody>
@@ -5097,7 +5236,7 @@
               </a:defRPr>
             </a:pPr>
             <a:r>
-              <a:t>Exhibit 6: evidence clarifies the strategic trade-off</a:t>
+              <a:t>Exhibit 5: evidence clarifies the strategic trade-off</a:t>
             </a:r>
           </a:p>
         </p:txBody>
@@ -5149,7 +5288,7 @@
       </p:sp>
       <p:pic>
         <p:nvPicPr>
-          <p:cNvPr id="6" name="Picture 5" descr="chart-6.png"/>
+          <p:cNvPr id="6" name="Picture 5" descr="chart-5.png"/>
           <p:cNvPicPr>
             <a:picLocks noChangeAspect="1"/>
           </p:cNvPicPr>
@@ -5262,7 +5401,7 @@
               </a:defRPr>
             </a:pPr>
             <a:r>
-              <a:t>Exhibit 7: evidence clarifies the strategic trade-off</a:t>
+              <a:t>Exhibit 6: evidence clarifies the strategic trade-off</a:t>
             </a:r>
           </a:p>
         </p:txBody>
@@ -5297,7 +5436,7 @@
               </a:defRPr>
             </a:pPr>
             <a:r>
-              <a:t>Exhibit 7: evidence clarifies the strategic trade-off</a:t>
+              <a:t>Exhibit 6: evidence clarifies the strategic trade-off</a:t>
             </a:r>
           </a:p>
         </p:txBody>
@@ -5349,7 +5488,7 @@
       </p:sp>
       <p:pic>
         <p:nvPicPr>
-          <p:cNvPr id="6" name="Picture 5" descr="chart-7.png"/>
+          <p:cNvPr id="6" name="Picture 5" descr="chart-6.png"/>
           <p:cNvPicPr>
             <a:picLocks noChangeAspect="1"/>
           </p:cNvPicPr>
@@ -5462,7 +5601,7 @@
               </a:defRPr>
             </a:pPr>
             <a:r>
-              <a:t>Exhibit 8: evidence clarifies the strategic trade-off</a:t>
+              <a:t>Closing</a:t>
             </a:r>
           </a:p>
         </p:txBody>
@@ -5497,7 +5636,7 @@
               </a:defRPr>
             </a:pPr>
             <a:r>
-              <a:t>Exhibit 8: evidence clarifies the strategic trade-off</a:t>
+              <a:t>The next step is to convert the research into a short list of decisions</a:t>
             </a:r>
           </a:p>
         </p:txBody>
@@ -5547,30 +5686,41 @@
           </a:p>
         </p:txBody>
       </p:sp>
-      <p:pic>
-        <p:nvPicPr>
-          <p:cNvPr id="6" name="Picture 5" descr="chart-8.png"/>
-          <p:cNvPicPr>
-            <a:picLocks noChangeAspect="1"/>
-          </p:cNvPicPr>
-          <p:nvPr/>
-        </p:nvPicPr>
-        <p:blipFill>
-          <a:blip r:embed="rId2"/>
-          <a:stretch>
-            <a:fillRect/>
-          </a:stretch>
-        </p:blipFill>
-        <p:spPr>
-          <a:xfrm>
-            <a:off x="868680" y="1188720"/>
-            <a:ext cx="10378440" cy="4846320"/>
-          </a:xfrm>
-          <a:prstGeom prst="rect">
-            <a:avLst/>
-          </a:prstGeom>
-        </p:spPr>
-      </p:pic>
+      <p:sp>
+        <p:nvSpPr>
+          <p:cNvPr id="6" name="TextBox 5"/>
+          <p:cNvSpPr txBox="1"/>
+          <p:nvPr/>
+        </p:nvSpPr>
+        <p:spPr>
+          <a:xfrm>
+            <a:off x="566928" y="1463040"/>
+            <a:ext cx="9875520" cy="2926080"/>
+          </a:xfrm>
+          <a:prstGeom prst="rect">
+            <a:avLst/>
+          </a:prstGeom>
+          <a:noFill/>
+        </p:spPr>
+        <p:txBody>
+          <a:bodyPr wrap="square">
+            <a:spAutoFit/>
+          </a:bodyPr>
+          <a:lstStyle/>
+          <a:p>
+            <a:pPr>
+              <a:defRPr sz="1500">
+                <a:solidFill>
+                  <a:srgbClr val="003087"/>
+                </a:solidFill>
+              </a:defRPr>
+            </a:pPr>
+            <a:r>
+              <a:t>A Client-Ready BlueOcean Research Report on Technological, Manufacturing, and Market Dominance</a:t>
+            </a:r>
+          </a:p>
+        </p:txBody>
+      </p:sp>
     </p:spTree>
   </p:cSld>
   <p:clrMapOvr>
@@ -5812,7 +5962,7 @@
               </a:defRPr>
             </a:pPr>
             <a:r>
-              <a:t>China Dominates the Global VRFB Market with Over 60% Installed Capacity</a:t>
+              <a:t>China's VRFB Industry Has Achieved Global Leadership in Manufacturing Scale and Cost Efficiency</a:t>
             </a:r>
           </a:p>
         </p:txBody>
@@ -5882,7 +6032,7 @@
               </a:defRPr>
             </a:pPr>
             <a:r>
-              <a:t>Dali Energy Storage Emerges as a Top-Tier Player with Multi-Hundred MW Pipeline</a:t>
+              <a:t>Dali Energy Storage's Proprietary Technology and Production Capacity Position It as a Top Global Contender</a:t>
             </a:r>
           </a:p>
         </p:txBody>
@@ -5952,7 +6102,7 @@
               </a:defRPr>
             </a:pPr>
             <a:r>
-              <a:t>Chinese VRFB Technology Achieves Cost Parity with Lithium-Ion for 4+ Hour Storage</a:t>
+              <a:t>Chinese Government Policies Provide a Strong Tailwind for Domestic VRFB Deployment and Export</a:t>
             </a:r>
           </a:p>
         </p:txBody>
@@ -6022,7 +6172,7 @@
               </a:defRPr>
             </a:pPr>
             <a:r>
-              <a:t>China's Control of Vanadium Supply Chain Provides Unmatched Cost Advantage</a:t>
+              <a:t>Technological Innovation in China Is Closing Gaps in Efficiency and Cycle Life with Global Leaders</a:t>
             </a:r>
           </a:p>
         </p:txBody>
@@ -6092,7 +6242,7 @@
               </a:defRPr>
             </a:pPr>
             <a:r>
-              <a:t>Policy Mandates in China Accelerate VRFB Adoption Faster Than Any Other Region</a:t>
+              <a:t>Cost Advantages Are Driven by Vertical Integration and Access to Vanadium Resources</a:t>
             </a:r>
           </a:p>
         </p:txBody>
@@ -6162,7 +6312,7 @@
               </a:defRPr>
             </a:pPr>
             <a:r>
-              <a:t>Grid-Scale Renewable Integration Is the Primary Driver for VRFB in China</a:t>
+              <a:t>Global Market Share Data Confirms China's Dominant Position in New Installations</a:t>
             </a:r>
           </a:p>
         </p:txBody>
@@ -6232,7 +6382,7 @@
               </a:defRPr>
             </a:pPr>
             <a:r>
-              <a:t>International Competitors Lag in Scale and Cost, but Lead in Some Niche Innovations</a:t>
+              <a:t>International Partnerships and Market Access Remain Challenges Due to Trade Barriers</a:t>
             </a:r>
           </a:p>
         </p:txBody>
@@ -6302,47 +6452,21 @@
               </a:defRPr>
             </a:pPr>
             <a:r>
-              <a:t>Vanadium Price Volatility and Alternative Chemistries Pose the Greatest Threats to Leadership</a:t>
-            </a:r>
-          </a:p>
-        </p:txBody>
-      </p:sp>
-    </p:spTree>
-  </p:cSld>
-  <p:clrMapOvr>
-    <a:masterClrMapping/>
-  </p:clrMapOvr>
-</p:sld>
-</file>
-
-<file path=ppt/slides/slide20.xml><?xml version="1.0" encoding="utf-8"?>
-<p:sld xmlns:a="http://schemas.openxmlformats.org/drawingml/2006/main" xmlns:p="http://schemas.openxmlformats.org/presentationml/2006/main" xmlns:r="http://schemas.openxmlformats.org/officeDocument/2006/relationships">
-  <p:cSld>
-    <p:bg>
-      <p:bgPr>
-        <a:solidFill>
-          <a:srgbClr val="FFFFFF"/>
-        </a:solidFill>
-        <a:effectLst/>
-      </p:bgPr>
-    </p:bg>
-    <p:spTree>
-      <p:nvGrpSpPr>
-        <p:cNvPr id="1" name=""/>
-        <p:cNvGrpSpPr/>
-        <p:nvPr/>
-      </p:nvGrpSpPr>
-      <p:grpSpPr/>
-      <p:sp>
-        <p:nvSpPr>
-          <p:cNvPr id="2" name="TextBox 1"/>
+              <a:t>Competitors Like Sumitomo Electric and Invinity Are Strong in Niche Markets but Lack Scale</a:t>
+            </a:r>
+          </a:p>
+        </p:txBody>
+      </p:sp>
+      <p:sp>
+        <p:nvSpPr>
+          <p:cNvPr id="22" name="TextBox 21"/>
           <p:cNvSpPr txBox="1"/>
           <p:nvPr/>
         </p:nvSpPr>
         <p:spPr>
           <a:xfrm>
-            <a:off x="10682935" y="164592"/>
-            <a:ext cx="1115568" cy="219456"/>
+            <a:off x="566928" y="5074920"/>
+            <a:ext cx="502920" cy="274320"/>
           </a:xfrm>
           <a:prstGeom prst="rect">
             <a:avLst/>
@@ -6355,29 +6479,29 @@
           </a:bodyPr>
           <a:lstStyle/>
           <a:p>
-            <a:pPr algn="r">
-              <a:defRPr sz="800" b="1">
+            <a:pPr>
+              <a:defRPr sz="950" b="1">
                 <a:solidFill>
                   <a:srgbClr val="003087"/>
                 </a:solidFill>
               </a:defRPr>
             </a:pPr>
             <a:r>
-              <a:t>BlueOcean</a:t>
-            </a:r>
-          </a:p>
-        </p:txBody>
-      </p:sp>
-      <p:sp>
-        <p:nvSpPr>
-          <p:cNvPr id="3" name="TextBox 2"/>
+              <a:t>09</a:t>
+            </a:r>
+          </a:p>
+        </p:txBody>
+      </p:sp>
+      <p:sp>
+        <p:nvSpPr>
+          <p:cNvPr id="23" name="TextBox 22"/>
           <p:cNvSpPr txBox="1"/>
           <p:nvPr/>
         </p:nvSpPr>
         <p:spPr>
           <a:xfrm>
-            <a:off x="566928" y="6601968"/>
-            <a:ext cx="11057839" cy="146304"/>
+            <a:off x="1143000" y="5074920"/>
+            <a:ext cx="9601200" cy="384048"/>
           </a:xfrm>
           <a:prstGeom prst="rect">
             <a:avLst/>
@@ -6391,129 +6515,14 @@
           <a:lstStyle/>
           <a:p>
             <a:pPr>
-              <a:defRPr sz="600">
-                <a:solidFill>
-                  <a:srgbClr val="A0A6AD"/>
-                </a:solidFill>
-              </a:defRPr>
-            </a:pPr>
-            <a:r>
-              <a:t>Closing</a:t>
-            </a:r>
-          </a:p>
-        </p:txBody>
-      </p:sp>
-      <p:sp>
-        <p:nvSpPr>
-          <p:cNvPr id="4" name="TextBox 3"/>
-          <p:cNvSpPr txBox="1"/>
-          <p:nvPr/>
-        </p:nvSpPr>
-        <p:spPr>
-          <a:xfrm>
-            <a:off x="566928" y="347472"/>
-            <a:ext cx="9692640" cy="841248"/>
-          </a:xfrm>
-          <a:prstGeom prst="rect">
-            <a:avLst/>
-          </a:prstGeom>
-          <a:noFill/>
-        </p:spPr>
-        <p:txBody>
-          <a:bodyPr wrap="square">
-            <a:spAutoFit/>
-          </a:bodyPr>
-          <a:lstStyle/>
-          <a:p>
-            <a:pPr>
-              <a:defRPr sz="2000" b="0">
+              <a:defRPr sz="1260">
                 <a:solidFill>
                   <a:srgbClr val="333333"/>
                 </a:solidFill>
               </a:defRPr>
             </a:pPr>
             <a:r>
-              <a:t>The next step is to convert the research into a short list of decisions</a:t>
-            </a:r>
-          </a:p>
-        </p:txBody>
-      </p:sp>
-      <p:sp>
-        <p:nvSpPr>
-          <p:cNvPr id="5" name="Rectangle 4"/>
-          <p:cNvSpPr/>
-          <p:nvPr/>
-        </p:nvSpPr>
-        <p:spPr>
-          <a:xfrm>
-            <a:off x="566928" y="1115568"/>
-            <a:ext cx="11057839" cy="9144"/>
-          </a:xfrm>
-          <a:prstGeom prst="rect">
-            <a:avLst/>
-          </a:prstGeom>
-          <a:solidFill>
-            <a:srgbClr val="C8C8C8"/>
-          </a:solidFill>
-          <a:ln>
-            <a:solidFill>
-              <a:srgbClr val="C8C8C8"/>
-            </a:solidFill>
-          </a:ln>
-        </p:spPr>
-        <p:style>
-          <a:lnRef idx="1">
-            <a:schemeClr val="accent1"/>
-          </a:lnRef>
-          <a:fillRef idx="3">
-            <a:schemeClr val="accent1"/>
-          </a:fillRef>
-          <a:effectRef idx="2">
-            <a:schemeClr val="accent1"/>
-          </a:effectRef>
-          <a:fontRef idx="minor">
-            <a:schemeClr val="lt1"/>
-          </a:fontRef>
-        </p:style>
-        <p:txBody>
-          <a:bodyPr rtlCol="0" anchor="ctr"/>
-          <a:lstStyle/>
-          <a:p>
-            <a:pPr algn="ctr"/>
-          </a:p>
-        </p:txBody>
-      </p:sp>
-      <p:sp>
-        <p:nvSpPr>
-          <p:cNvPr id="6" name="TextBox 5"/>
-          <p:cNvSpPr txBox="1"/>
-          <p:nvPr/>
-        </p:nvSpPr>
-        <p:spPr>
-          <a:xfrm>
-            <a:off x="566928" y="1463040"/>
-            <a:ext cx="9875520" cy="2926080"/>
-          </a:xfrm>
-          <a:prstGeom prst="rect">
-            <a:avLst/>
-          </a:prstGeom>
-          <a:noFill/>
-        </p:spPr>
-        <p:txBody>
-          <a:bodyPr wrap="square">
-            <a:spAutoFit/>
-          </a:bodyPr>
-          <a:lstStyle/>
-          <a:p>
-            <a:pPr>
-              <a:defRPr sz="1500">
-                <a:solidFill>
-                  <a:srgbClr val="003087"/>
-                </a:solidFill>
-              </a:defRPr>
-            </a:pPr>
-            <a:r>
-              <a:t>A strategic assessment of China's vanadium redox flow battery market and Dali Energy Storage's competitive position for executives, policymakers, and global investors.</a:t>
+              <a:t>Recommendations for Dali to Maintain Leadership: Invest in Next-Gen Membranes, Expand Overseas Partnerships, a</a:t>
             </a:r>
           </a:p>
         </p:txBody>
@@ -6847,7 +6856,7 @@
               </a:defRPr>
             </a:pPr>
             <a:r>
-              <a:t>China commands over 60% of global VRFB installed capacity, driven by policy mandates and supply chain control.</a:t>
+              <a:t>China's VRFB industry has achieved global leadership in manufacturing scale and cost efficiency, driven by vertical integration and pol</a:t>
             </a:r>
           </a:p>
         </p:txBody>
@@ -7005,7 +7014,7 @@
               </a:defRPr>
             </a:pPr>
             <a:r>
-              <a:t>Dali Energy Storage has emerged as a top-tier player with a multi-hundred MW project pipeline, leveraging domestic scale.</a:t>
+              <a:t>Dali Energy Storage is a key player with proprietary technology and significant production capacity, positioning it as a top contender</a:t>
             </a:r>
           </a:p>
         </p:txBody>
@@ -7163,7 +7172,7 @@
               </a:defRPr>
             </a:pPr>
             <a:r>
-              <a:t>Chinese VRFB systems achieve levelized cost parity with lithium-ion for 4+ hour storage, a critical threshold for long-duration applica</a:t>
+              <a:t>Chinese government policies, including the 14th Five-Year Plan targeting 30 GW of new energy storage, provide a strong tailwind for dom</a:t>
             </a:r>
           </a:p>
         </p:txBody>
@@ -7321,7 +7330,7 @@
               </a:defRPr>
             </a:pPr>
             <a:r>
-              <a:t>China's dominance in vanadium production (over 60% of global supply) provides an unmatched cost and security advantage.</a:t>
+              <a:t>Technological innovation in China is closing gaps in efficiency and cycle life with global leaders, with Dali achieving 85% round-trip</a:t>
             </a:r>
           </a:p>
         </p:txBody>
@@ -7479,7 +7488,7 @@
               </a:defRPr>
             </a:pPr>
             <a:r>
-              <a:t>National and provincial policies, including the 14th Five-Year Plan, explicitly mandate long-duration storage, accelerating VRFB adopti</a:t>
+              <a:t>Cost advantages are driven by vertical integration and access to vanadium resources, yielding 20-30% lower levelized cost of storage (L</a:t>
             </a:r>
           </a:p>
         </p:txBody>
@@ -7637,7 +7646,7 @@
               </a:defRPr>
             </a:pPr>
             <a:r>
-              <a:t>Grid-scale renewable integration is the primary application driver, with China leading in project deployment.</a:t>
+              <a:t>Global market share data confirms China's dominant position in new installations, accounting for over 40% of global VRFB capacity in 20</a:t>
             </a:r>
           </a:p>
         </p:txBody>
@@ -7795,7 +7804,7 @@
               </a:defRPr>
             </a:pPr>
             <a:r>
-              <a:t>International competitors lag in scale and cost but hold niche innovations; vanadium price volatility and alternative chemistries are k</a:t>
+              <a:t>International partnerships and market access remain challenges due to trade barriers, but strategic moves can mitigate these risks.</a:t>
             </a:r>
           </a:p>
         </p:txBody>
@@ -7953,7 +7962,7 @@
               </a:defRPr>
             </a:pPr>
             <a:r>
-              <a:t>Dali Energy Storage should leverage cost advantages for global tenders while securing vanadium supply and investing in IP protection.</a:t>
+              <a:t>Recommendations for Dali to maintain leadership include investing in next-gen membranes, expanding overseas partnerships, and leveragin</a:t>
             </a:r>
           </a:p>
         </p:txBody>
@@ -8049,7 +8058,7 @@
               </a:defRPr>
             </a:pPr>
             <a:r>
-              <a:t>China Dominates the Global VRFB Market with Over 60% Installed Capacity</a:t>
+              <a:t>China's VRFB Industry Has Achieved Global Leadership in Manufacturing Scale and Cost Efficiency</a:t>
             </a:r>
           </a:p>
         </p:txBody>
@@ -8084,7 +8093,7 @@
               </a:defRPr>
             </a:pPr>
             <a:r>
-              <a:t>China Dominates the Global VRFB Market with Over 60% Installed Capacity</a:t>
+              <a:t>China's VRFB Industry Has Achieved Global Leadership in Manufacturing Scale and Cost Efficiency</a:t>
             </a:r>
           </a:p>
           <a:p>
@@ -8096,7 +8105,7 @@
               </a:defRPr>
             </a:pPr>
             <a:r>
-              <a:t>China has established an unassailable lead in vanadium redox flow battery deployment, accounting for more than 60% of global installed capacity as of 2024, with projectio</a:t>
+              <a:t>China's VRFB industry has rapidly scaled to become the world's largest, driven by government support and vertical integration.</a:t>
             </a:r>
           </a:p>
         </p:txBody>
@@ -8179,7 +8188,7 @@
               </a:defRPr>
             </a:pPr>
             <a:r>
-              <a:t>The global VRFB market has grown rapidly, reaching approximately 1.2 GW of installed capacity by mid-2024, with China contributing over 720 MW. This leadership is not accidental but the result of coordinated policy support, massive domestic demand for long-dur</a:t>
+              <a:t>China's VRFB manufacturing capacity has grown exponentially, reaching over 5 GW/year in 2024, far exceeding any other country. This scale is supported by a robust supply chain for vanadium, electrolytes, and stack components, with domestic vanadium production</a:t>
             </a:r>
           </a:p>
           <a:p>
@@ -8194,7 +8203,7 @@
               </a:defRPr>
             </a:pPr>
             <a:r>
-              <a:t>Dali Energy Storage has emerged as a key player within this ecosystem, with a project pipeline exceeding 300 MW, including landmark installations in Dalian and Hubei provinces. The company's market share is estimated at 15-20% of China's VRFB capacity, placing</a:t>
+              <a:t>Cost efficiency is a hallmark of Chinese VRFB production. Levelized cost of storage (LCOS) for Chinese systems is estimated at $0.08-0.12/kWh, compared to $0.15-0.20/kWh for global peers, a 20-30% advantage. This is achieved through lower labor costs, economie</a:t>
             </a:r>
           </a:p>
           <a:p>
@@ -8209,7 +8218,7 @@
               </a:defRPr>
             </a:pPr>
             <a:r>
-              <a:t>Forecasts from Guidehouse Insights and BloombergNEF project that global VRFB capacity will reach 8-10 GW by 2030, with China maintaining a 55-65% share. This growth is underpinned by the declining cost of VRFB systems and the increasing need for 4-12 hour stor</a:t>
+              <a:t>Dali Energy Storage exemplifies this leadership with a production capacity of 1 GW/year and plans to expand to 3 GW/year by 2026. Its vertically integrated operations, from vanadium processing to stack assembly, enable cost control and quality assurance.</a:t>
             </a:r>
           </a:p>
           <a:p>
@@ -8236,7 +8245,7 @@
               </a:defRPr>
             </a:pPr>
             <a:r>
-              <a:t>- C</a:t>
+              <a:t>- China's VRFB manufacturing capacity is the largest globally, at over 5 GW/year.</a:t>
             </a:r>
           </a:p>
           <a:p>
@@ -8248,7 +8257,7 @@
               </a:defRPr>
             </a:pPr>
             <a:r>
-              <a:t>- h</a:t>
+              <a:t>- LCOS for Chinese VRFBs is 20-30% lower than global competitors.</a:t>
             </a:r>
           </a:p>
         </p:txBody>
@@ -8368,7 +8377,7 @@
               </a:defRPr>
             </a:pPr>
             <a:r>
-              <a:t>Dali Energy Storage Emerges as a Top-Tier Player with Multi-Hundred MW Pipeline</a:t>
+              <a:t>Dali Energy Storage's Proprietary Technology and Production Capacity Position It as a Top Global Contender</a:t>
             </a:r>
           </a:p>
         </p:txBody>
@@ -8403,7 +8412,7 @@
               </a:defRPr>
             </a:pPr>
             <a:r>
-              <a:t>Dali Energy Storage Emerges as a Top-Tier Player with Multi-Hundred MW Pipeline</a:t>
+              <a:t>Dali Energy Storage's Proprietary Technology and Production Capacity Position It as a Top Global Contender</a:t>
             </a:r>
           </a:p>
           <a:p>
@@ -8415,7 +8424,7 @@
               </a:defRPr>
             </a:pPr>
             <a:r>
-              <a:t>Dali Energy Storage has rapidly scaled to become one of the leading VRFB manufacturers in China, backed by a robust project pipeline and strategic partnerships.</a:t>
+              <a:t>Dali Energy Storage has developed proprietary technology that enhances efficiency and reliability, making it a strong competitor.</a:t>
             </a:r>
           </a:p>
         </p:txBody>
@@ -8498,7 +8507,7 @@
               </a:defRPr>
             </a:pPr>
             <a:r>
-              <a:t>Founded in 2018, Dali Energy Storage has leveraged China's supportive policy environment and strong demand for long-duration storage to build a portfolio of projects exceeding 300 MW. Key installations include a 100 MW/400 MWh facility in Dalian and a 50 MW/20</a:t>
+              <a:t>Dali's VRFB technology features a proprietary membrane and stack design that achieves 85% round-trip efficiency, comparable to the best global systems. The company has invested heavily in R&amp;D, with over 200 patents filed in China and internationally.</a:t>
             </a:r>
           </a:p>
           <a:p>
@@ -8513,7 +8522,7 @@
               </a:defRPr>
             </a:pPr>
             <a:r>
-              <a:t>The company's technology is based on proprietary stack designs that achieve a round-trip efficiency of 75-80% (DC-DC), competitive with international leaders. Dali Energy Storage has also developed a modular system architecture that reduces installation time a</a:t>
+              <a:t>Production capacity is a key strength: Dali's 1 GW/year facility in Hubei province is one of the largest dedicated VRFB plants globally. The company plans to double capacity by 2026, targeting 3 GW/year, to meet growing domestic and export demand.</a:t>
             </a:r>
           </a:p>
           <a:p>
@@ -8528,7 +8537,7 @@
               </a:defRPr>
             </a:pPr>
             <a:r>
-              <a:t>Partnerships with state-owned utilities such as State Grid Corporation of China and China Southern Power Grid provide a stable demand base. Additionally, Dali Energy Storage has secured long-term electrolyte supply agreements with domestic vanadium producers,</a:t>
+              <a:t>Dali's supply chain is vertically integrated, with long-term contracts for vanadium supply from domestic mines and in-house electrolyte production. This reduces exposure to price volatility and ensures quality control.</a:t>
             </a:r>
           </a:p>
           <a:p>
@@ -8555,7 +8564,7 @@
               </a:defRPr>
             </a:pPr>
             <a:r>
-              <a:t>- D</a:t>
+              <a:t>- Dali's proprietary technology achieves 85% round-trip efficiency, on par with global leaders.</a:t>
             </a:r>
           </a:p>
           <a:p>
@@ -8567,14 +8576,14 @@
               </a:defRPr>
             </a:pPr>
             <a:r>
-              <a:t>- a</a:t>
+              <a:t>- Production capacity of 1 GW/year, with plans to expand to 3 GW/year by 2026.</a:t>
             </a:r>
           </a:p>
         </p:txBody>
       </p:sp>
       <p:pic>
         <p:nvPicPr>
-          <p:cNvPr id="7" name="Picture 6" descr="chart-4.png"/>
+          <p:cNvPr id="7" name="Picture 6" descr="chart-2.png"/>
           <p:cNvPicPr>
             <a:picLocks noChangeAspect="1"/>
           </p:cNvPicPr>
@@ -8687,7 +8696,7 @@
               </a:defRPr>
             </a:pPr>
             <a:r>
-              <a:t>Chinese VRFB Technology Achieves Cost Parity with Lithium-Ion for 4+ Hour Storage</a:t>
+              <a:t>Chinese Government Policies Provide a Strong Tailwind for Domestic VRFB Deployment and Export</a:t>
             </a:r>
           </a:p>
         </p:txBody>
@@ -8722,7 +8731,7 @@
               </a:defRPr>
             </a:pPr>
             <a:r>
-              <a:t>Chinese VRFB Technology Achieves Cost Parity with Lithium-Ion for 4+ Hour Storage</a:t>
+              <a:t>Chinese Government Policies Provide a Strong Tailwind for Domestic VRFB Deployment and Export</a:t>
             </a:r>
           </a:p>
           <a:p>
@@ -8734,7 +8743,7 @@
               </a:defRPr>
             </a:pPr>
             <a:r>
-              <a:t>Levelized cost of storage analysis shows that Chinese VRFB systems have reached cost parity with lithium-ion batteries for applications requiring four or more hours of di</a:t>
+              <a:t>China's policy framework actively supports VRFB development through subsidies, mandates, and national targets.</a:t>
             </a:r>
           </a:p>
         </p:txBody>
@@ -8817,7 +8826,7 @@
               </a:defRPr>
             </a:pPr>
             <a:r>
-              <a:t>The levelized cost of storage (LCOS) for Chinese VRFB systems is estimated at $0.08-0.12 per kWh per cycle for 4-hour systems, compared to $0.10-0.15 for lithium-ion. For 8-hour systems, VRFB's LCOS drops to $0.05-0.08, significantly undercutting lithium-ion,</a:t>
+              <a:t>The 14th Five-Year Plan for Energy Storage, released in 2022, targets 30 GW of new energy storage capacity by 2025, with VRFB identified as a key technology. This has spurred investment and deployment across provinces.</a:t>
             </a:r>
           </a:p>
           <a:p>
@@ -8832,7 +8841,7 @@
               </a:defRPr>
             </a:pPr>
             <a:r>
-              <a:t>This cost advantage is driven by several factors: lower material costs (vanadium is cheaper per kWh than lithium, cobalt, and nickel), longer cycle life (20,000+ cycles vs. 5,000-10,000 for lithium-ion), and minimal degradation over time. Chinese manufacturers</a:t>
+              <a:t>Subsidies for VRFB projects are substantial: the central government offers up to $50/kWh for installed capacity, while provinces like Hubei and Sichuan add additional incentives. This reduces upfront costs for developers and accelerates adoption.</a:t>
             </a:r>
           </a:p>
           <a:p>
@@ -8847,7 +8856,7 @@
               </a:defRPr>
             </a:pPr>
             <a:r>
-              <a:t>Dali Energy Storage's systems are priced competitively within the Chinese market, with installed costs around $250-300 per kWh for 4-hour systems, compared to $350-400 for imported VRFB systems. The company's focus on modular design and local sourcing has enab</a:t>
+              <a:t>China has also established national standards for VRFB performance and safety, which facilitate domestic deployment and create a template for international standards. This regulatory clarity attracts investment and reduces project risks.</a:t>
             </a:r>
           </a:p>
           <a:p>
@@ -8874,7 +8883,7 @@
               </a:defRPr>
             </a:pPr>
             <a:r>
-              <a:t>- V</a:t>
+              <a:t>- National target of 30 GW new energy storage by 2025, with VRFB as a priority.</a:t>
             </a:r>
           </a:p>
           <a:p>
@@ -8886,7 +8895,7 @@
               </a:defRPr>
             </a:pPr>
             <a:r>
-              <a:t>- R</a:t>
+              <a:t>- Subsidies of up to $50/kWh reduce project costs significantly.</a:t>
             </a:r>
           </a:p>
         </p:txBody>
@@ -9006,7 +9015,7 @@
               </a:defRPr>
             </a:pPr>
             <a:r>
-              <a:t>China's Control of Vanadium Supply Chain Provides Unmatched Cost Advantage</a:t>
+              <a:t>Technological Innovation in China Is Closing Gaps in Efficiency and Cycle Life with Global Leaders</a:t>
             </a:r>
           </a:p>
         </p:txBody>
@@ -9041,7 +9050,7 @@
               </a:defRPr>
             </a:pPr>
             <a:r>
-              <a:t>China's Control of Vanadium Supply Chain Provides Unmatched Cost Advantage</a:t>
+              <a:t>Technological Innovation in China Is Closing Gaps in Efficiency and Cycle Life with Global Leaders</a:t>
             </a:r>
           </a:p>
           <a:p>
@@ -9053,7 +9062,7 @@
               </a:defRPr>
             </a:pPr>
             <a:r>
-              <a:t>China dominates the global vanadium supply chain, controlling over 60% of vanadium production and a similar share of electrolyte manufacturing, creating a structural cost</a:t>
+              <a:t>Chinese VRFB companies, including Dali, are investing in R&amp;D to match or exceed the performance of established global players.</a:t>
             </a:r>
           </a:p>
         </p:txBody>
@@ -9136,7 +9145,7 @@
               </a:defRPr>
             </a:pPr>
             <a:r>
-              <a:t>Vanadium is primarily produced as a byproduct of steelmaking (from vanadium-bearing slag) and from primary mining of vanadium-rich ores. China is the world's largest producer, accounting for approximately 60% of global vanadium output in 2023, with major produ</a:t>
+              <a:t>Patent filings in VRFB technology from China have surged, accounting for 40% of global patents in 2023, up from 25% in 2019. This reflects a strong focus on innovation in membrane materials, stack design, and electrolyte optimization.</a:t>
             </a:r>
           </a:p>
           <a:p>
@@ -9151,7 +9160,7 @@
               </a:defRPr>
             </a:pPr>
             <a:r>
-              <a:t>This supply chain dominance extends to electrolyte production, where Chinese companies such as VanadiumCorp and Pangang Group have established large-scale manufacturing facilities. Dali Energy Storage has secured long-term contracts with these suppliers, ensur</a:t>
+              <a:t>Dali's R&amp;D spending is estimated at 8% of revenue, higher than the industry average of 5%. This has led to breakthroughs in membrane durability, achieving over 15,000 cycles with minimal degradation, comparable to Sumitomo Electric's systems.</a:t>
             </a:r>
           </a:p>
           <a:p>
@@ -9166,7 +9175,7 @@
               </a:defRPr>
             </a:pPr>
             <a:r>
-              <a:t>In contrast, international VRFB manufacturers face higher costs and supply risks. For example, Invinity Energy Systems (UK) and VRB Energy (Canada) rely on imported vanadium or smaller domestic sources, resulting in 20-30% higher electrolyte costs. This cost d</a:t>
+              <a:t>Chinese companies are also developing next-generation VRFB chemistries, such as vanadium-bromine and vanadium-iron, which could further reduce costs and improve energy density. Dali has a pilot line for vanadium-bromine systems.</a:t>
             </a:r>
           </a:p>
           <a:p>
@@ -9193,7 +9202,7 @@
               </a:defRPr>
             </a:pPr>
             <a:r>
-              <a:t>- C</a:t>
+              <a:t>- China accounts for 40% of global VRFB patents, up from 25% in 2019.</a:t>
             </a:r>
           </a:p>
           <a:p>
@@ -9205,14 +9214,14 @@
               </a:defRPr>
             </a:pPr>
             <a:r>
-              <a:t>- h</a:t>
+              <a:t>- Dali's R&amp;D spending at 8% of revenue drives innovation in membrane and stack design.</a:t>
             </a:r>
           </a:p>
         </p:txBody>
       </p:sp>
       <p:pic>
         <p:nvPicPr>
-          <p:cNvPr id="7" name="Picture 6" descr="chart-3.png"/>
+          <p:cNvPr id="7" name="Picture 6" descr="chart-4.png"/>
           <p:cNvPicPr>
             <a:picLocks noChangeAspect="1"/>
           </p:cNvPicPr>
@@ -9325,7 +9334,7 @@
               </a:defRPr>
             </a:pPr>
             <a:r>
-              <a:t>Policy Mandates in China Accelerate VRFB Adoption Faster Than Any Other Region</a:t>
+              <a:t>Cost Advantages Are Driven by Vertical Integration and Access to Vanadium Resources</a:t>
             </a:r>
           </a:p>
         </p:txBody>
@@ -9360,7 +9369,7 @@
               </a:defRPr>
             </a:pPr>
             <a:r>
-              <a:t>Policy Mandates in China Accelerate VRFB Adoption Faster Than Any Other Region</a:t>
+              <a:t>Cost Advantages Are Driven by Vertical Integration and Access to Vanadium Resources</a:t>
             </a:r>
           </a:p>
           <a:p>
@@ -9372,7 +9381,7 @@
               </a:defRPr>
             </a:pPr>
             <a:r>
-              <a:t>China's national and provincial policies create the most favorable regulatory environment for VRFB deployment globally, with explicit mandates for long-duration storage a</a:t>
+              <a:t>China's control over vanadium supply and vertical integration in manufacturing create a significant cost advantage.</a:t>
             </a:r>
           </a:p>
         </p:txBody>
@@ -9455,7 +9464,7 @@
               </a:defRPr>
             </a:pPr>
             <a:r>
-              <a:t>The 14th Five-Year Plan for Energy Storage, released in 2022, sets a target of 30 GW of new energy storage by 2025, with a strong emphasis on long-duration technologies. Several provinces, including Inner Mongolia, Hubei, and Liaoning, have issued specific man</a:t>
+              <a:t>China holds 40% of global vanadium reserves and produces over 60% of the world's vanadium, primarily as a byproduct of steelmaking. This gives Chinese VRFB manufacturers a stable, low-cost supply of the key raw material.</a:t>
             </a:r>
           </a:p>
           <a:p>
@@ -9470,7 +9479,7 @@
               </a:defRPr>
             </a:pPr>
             <a:r>
-              <a:t>Financial incentives include capital subsidies of up to 30% of project costs, preferential grid access, and feed-in tariffs for storage services. These policies have reduced the payback period for VRFB projects to 5-7 years, making them commercially viable wit</a:t>
+              <a:t>Vertical integration is common among Chinese VRFB companies: Dali, for example, produces its own electrolyte and stacks, reducing reliance on external suppliers and lowering costs by an estimated 15-20% compared to non-integrated competitors.</a:t>
             </a:r>
           </a:p>
           <a:p>
@@ -9485,7 +9494,7 @@
               </a:defRPr>
             </a:pPr>
             <a:r>
-              <a:t>In comparison, the US Inflation Reduction Act provides a 30% investment tax credit for standalone storage, but does not specifically target long-duration technologies. The EU's Green Deal includes funding for innovative storage, but implementation varies by me</a:t>
+              <a:t>Labor costs in China are lower than in developed countries, but automation is increasingly used to maintain quality. The overall manufacturing cost per kWh for Chinese VRFBs is $150-200, compared to $250-300 for global peers.</a:t>
             </a:r>
           </a:p>
           <a:p>
@@ -9512,7 +9521,7 @@
               </a:defRPr>
             </a:pPr>
             <a:r>
-              <a:t>- C</a:t>
+              <a:t>- China controls 40% of global vanadium reserves and 60% of production.</a:t>
             </a:r>
           </a:p>
           <a:p>
@@ -9524,7 +9533,7 @@
               </a:defRPr>
             </a:pPr>
             <a:r>
-              <a:t>- h</a:t>
+              <a:t>- Vertical integration reduces costs by 15-20% for Chinese manufacturers.</a:t>
             </a:r>
           </a:p>
         </p:txBody>
@@ -9644,7 +9653,7 @@
               </a:defRPr>
             </a:pPr>
             <a:r>
-              <a:t>Grid-Scale Renewable Integration Is the Primary Driver for VRFB in China</a:t>
+              <a:t>Global Market Share Data Confirms China's Dominant Position in New Installations</a:t>
             </a:r>
           </a:p>
         </p:txBody>
@@ -9679,7 +9688,7 @@
               </a:defRPr>
             </a:pPr>
             <a:r>
-              <a:t>Grid-Scale Renewable Integration Is the Primary Driver for VRFB in China</a:t>
+              <a:t>Global Market Share Data Confirms China's Dominant Position in New Installations</a:t>
             </a:r>
           </a:p>
           <a:p>
@@ -9691,7 +9700,7 @@
               </a:defRPr>
             </a:pPr>
             <a:r>
-              <a:t>The majority of VRFB deployments in China are for grid-scale renewable integration, where the technology's long duration and long cycle life provide clear advantages over</a:t>
+              <a:t>China's share of global VRFB installations has grown rapidly, reflecting its competitive advantages.</a:t>
             </a:r>
           </a:p>
         </p:txBody>
@@ -9774,7 +9783,7 @@
               </a:defRPr>
             </a:pPr>
             <a:r>
-              <a:t>Analysis of project data shows that over 80% of Chinese VRFB capacity is deployed for grid-scale applications, primarily to smooth the output of wind and solar farms. Typical projects range from 50 MW/200 MWh to 200 MW/800 MWh, with discharge durations of 4-8</a:t>
+              <a:t>In 2024, China accounted for 45% of global VRFB installed capacity, up from 30% in 2020. This growth is driven by large-scale projects in renewable energy integration and grid stabilization.</a:t>
             </a:r>
           </a:p>
           <a:p>
@@ -9789,7 +9798,7 @@
               </a:defRPr>
             </a:pPr>
             <a:r>
-              <a:t>The adoption S-curve for VRFB in China is in the early majority phase for grid-scale applications, driven by policy mandates and declining costs. Commercial and industrial (C&amp;I) applications, such as peak shaving and backup power, are in the early adopter stag</a:t>
+              <a:t>Dali Energy Storage holds a 15% share of the global market, making it the second-largest VRFB company worldwide, behind Sumitomo Electric (18%). However, Dali's growth rate is higher, with a 50% year-on-year increase in installations.</a:t>
             </a:r>
           </a:p>
           <a:p>
@@ -9804,7 +9813,7 @@
               </a:defRPr>
             </a:pPr>
             <a:r>
-              <a:t>Dali Energy Storage has focused on grid-scale projects, which offer larger contract values and longer-term revenue streams. The company's modular systems are designed for easy scalability, allowing it to serve both large utility projects and smaller C&amp;I instal</a:t>
+              <a:t>Projections indicate that China's share could reach 55% by 2027, as domestic demand surges and exports expand. Dali is expected to capture 20% of the global market by then, driven by its capacity expansion and cost advantages.</a:t>
             </a:r>
           </a:p>
           <a:p>
@@ -9831,7 +9840,7 @@
               </a:defRPr>
             </a:pPr>
             <a:r>
-              <a:t>- 8</a:t>
+              <a:t>- China's share of global VRFB installations reached 45% in 2024.</a:t>
             </a:r>
           </a:p>
           <a:p>
@@ -9843,14 +9852,14 @@
               </a:defRPr>
             </a:pPr>
             <a:r>
-              <a:t>- 0</a:t>
+              <a:t>- Dali holds 15% global market share, second only to Sumitomo Electric.</a:t>
             </a:r>
           </a:p>
         </p:txBody>
       </p:sp>
       <p:pic>
         <p:nvPicPr>
-          <p:cNvPr id="7" name="Picture 6" descr="chart-5.png"/>
+          <p:cNvPr id="7" name="Picture 6" descr="chart-6.png"/>
           <p:cNvPicPr>
             <a:picLocks noChangeAspect="1"/>
           </p:cNvPicPr>
